--- a/dist/claude/artifacts/pptx/maslow-brand-starter.pptx
+++ b/dist/claude/artifacts/pptx/maslow-brand-starter.pptx
@@ -2,19 +2,19 @@
 <file path=ppt/presentation.xml><?xml version="1.0" encoding="utf-8"?>
 <p:presentation xmlns:p="http://schemas.openxmlformats.org/presentationml/2006/main">
   <p:sldMasterIdLst>
-    <p:sldMasterId xmlns:r="http://schemas.openxmlformats.org/officeDocument/2006/relationships" id="2147483648" r:id="R788d85f4dfe044f5"/>
-    <p:sldMasterId xmlns:r="http://schemas.openxmlformats.org/officeDocument/2006/relationships" id="2147483650" r:id="R8da1ba84408a4106"/>
+    <p:sldMasterId xmlns:r="http://schemas.openxmlformats.org/officeDocument/2006/relationships" id="2147483648" r:id="R7aaebd267a0c4080"/>
+    <p:sldMasterId xmlns:r="http://schemas.openxmlformats.org/officeDocument/2006/relationships" id="2147483650" r:id="R934431c6f8114871"/>
   </p:sldMasterIdLst>
   <p:notesMasterIdLst>
-    <p:notesMasterId xmlns:r="http://schemas.openxmlformats.org/officeDocument/2006/relationships" r:id="Ra80f3a1956a14533"/>
+    <p:notesMasterId xmlns:r="http://schemas.openxmlformats.org/officeDocument/2006/relationships" r:id="Rc29934d95e61498a"/>
   </p:notesMasterIdLst>
   <p:sldIdLst>
-    <p:sldId xmlns:r="http://schemas.openxmlformats.org/officeDocument/2006/relationships" id="256" r:id="R35878c1873244602"/>
-    <p:sldId xmlns:r="http://schemas.openxmlformats.org/officeDocument/2006/relationships" id="257" r:id="R7e2cc19567e54976"/>
-    <p:sldId xmlns:r="http://schemas.openxmlformats.org/officeDocument/2006/relationships" id="258" r:id="R2c852c213f604e26"/>
-    <p:sldId xmlns:r="http://schemas.openxmlformats.org/officeDocument/2006/relationships" id="259" r:id="R11e54e18193040d7"/>
-    <p:sldId xmlns:r="http://schemas.openxmlformats.org/officeDocument/2006/relationships" id="260" r:id="R5e9d56c59804492a"/>
-    <p:sldId xmlns:r="http://schemas.openxmlformats.org/officeDocument/2006/relationships" id="261" r:id="Rd84d692b94c74559"/>
+    <p:sldId xmlns:r="http://schemas.openxmlformats.org/officeDocument/2006/relationships" id="256" r:id="R79bcf72b3c0e4be2"/>
+    <p:sldId xmlns:r="http://schemas.openxmlformats.org/officeDocument/2006/relationships" id="257" r:id="Rbee1fa5047a843ba"/>
+    <p:sldId xmlns:r="http://schemas.openxmlformats.org/officeDocument/2006/relationships" id="258" r:id="R07a3c794ca834db5"/>
+    <p:sldId xmlns:r="http://schemas.openxmlformats.org/officeDocument/2006/relationships" id="259" r:id="R661472748ec849c3"/>
+    <p:sldId xmlns:r="http://schemas.openxmlformats.org/officeDocument/2006/relationships" id="260" r:id="R3a7cf282aaee4622"/>
+    <p:sldId xmlns:r="http://schemas.openxmlformats.org/officeDocument/2006/relationships" id="261" r:id="R44cf524388d44e62"/>
   </p:sldIdLst>
   <p:sldSz cx="12192000" cy="6858000"/>
   <p:notesSz cx="6858000" cy="9144000"/>
@@ -166,7 +166,7 @@
 <file path=ppt/notesMasters/theme/theme4.xml><?xml version="1.0" encoding="utf-8"?>
 <a:theme xmlns:a="http://schemas.openxmlformats.org/drawingml/2006/main" name="ChatGPT">
   <a:themeElements>
-    <a:clrScheme name="Maslow Brand OS 1.0.0">
+    <a:clrScheme name="Maslow Brand OS 1.0.1">
       <a:dk1>
         <a:srgbClr val="333333"/>
       </a:dk1>
@@ -216,7 +216,7 @@
         <a:cs typeface="Calibri"/>
       </a:minorFont>
     </a:fontScheme>
-    <a:fmtScheme name="Maslow Brand OS 1.0.0">
+    <a:fmtScheme name="Maslow Brand OS 1.0.1">
       <a:fillStyleLst>
         <a:solidFill>
           <a:schemeClr val="phClr"/>
@@ -862,7 +862,7 @@
           <p:cNvPr id="2" name="01 Title background">
             <a:extLst xmlns:a="http://schemas.openxmlformats.org/drawingml/2006/main">
               <a:ext uri="{FF2B5EF4-FFF2-40B4-BE49-F238E27FC236}">
-                <a16:creationId xmlns:a16="http://schemas.microsoft.com/office/drawing/2014/main" id="{05A37D30-40E0-4E3B-99CE-B5FD04BB4046}"/>
+                <a16:creationId xmlns:a16="http://schemas.microsoft.com/office/drawing/2014/main" id="{8F9AC916-015E-4793-A88E-3755DF4816B7}"/>
               </a:ext>
             </a:extLst>
           </p:cNvPr>
@@ -893,7 +893,7 @@
           <p:cNvPr id="3" name="01 Title title 0">
             <a:extLst xmlns:a="http://schemas.openxmlformats.org/drawingml/2006/main">
               <a:ext uri="{FF2B5EF4-FFF2-40B4-BE49-F238E27FC236}">
-                <a16:creationId xmlns:a16="http://schemas.microsoft.com/office/drawing/2014/main" id="{E7A3547E-76EC-400F-8959-D701E6DB83A2}"/>
+                <a16:creationId xmlns:a16="http://schemas.microsoft.com/office/drawing/2014/main" id="{EC974B2B-B50E-4135-BD6C-C62BA1BE6D25}"/>
               </a:ext>
             </a:extLst>
           </p:cNvPr>
@@ -925,7 +925,7 @@
           <p:cNvPr id="4" name="01 Title subtitle 0">
             <a:extLst xmlns:a="http://schemas.openxmlformats.org/drawingml/2006/main">
               <a:ext uri="{FF2B5EF4-FFF2-40B4-BE49-F238E27FC236}">
-                <a16:creationId xmlns:a16="http://schemas.microsoft.com/office/drawing/2014/main" id="{793A63C9-DB6B-4362-B5E1-A4B9BD658E32}"/>
+                <a16:creationId xmlns:a16="http://schemas.microsoft.com/office/drawing/2014/main" id="{D4CDE733-99F7-4470-AA8D-6464E96FC40E}"/>
               </a:ext>
             </a:extLst>
           </p:cNvPr>
@@ -974,7 +974,7 @@
           <p:cNvPr id="2" name="02 Section background">
             <a:extLst xmlns:a="http://schemas.openxmlformats.org/drawingml/2006/main">
               <a:ext uri="{FF2B5EF4-FFF2-40B4-BE49-F238E27FC236}">
-                <a16:creationId xmlns:a16="http://schemas.microsoft.com/office/drawing/2014/main" id="{3D16892E-551C-4D31-9A74-003F96BBB840}"/>
+                <a16:creationId xmlns:a16="http://schemas.microsoft.com/office/drawing/2014/main" id="{6924DCB9-0370-4FCF-BFF8-CAF88CA4D996}"/>
               </a:ext>
             </a:extLst>
           </p:cNvPr>
@@ -1005,7 +1005,7 @@
           <p:cNvPr id="3" name="02 Section title 0">
             <a:extLst xmlns:a="http://schemas.openxmlformats.org/drawingml/2006/main">
               <a:ext uri="{FF2B5EF4-FFF2-40B4-BE49-F238E27FC236}">
-                <a16:creationId xmlns:a16="http://schemas.microsoft.com/office/drawing/2014/main" id="{7CC34B9B-0C69-47E8-B7E9-F91433DB8FFB}"/>
+                <a16:creationId xmlns:a16="http://schemas.microsoft.com/office/drawing/2014/main" id="{7E2B36E3-2A41-4380-ADDF-721E6F57F237}"/>
               </a:ext>
             </a:extLst>
           </p:cNvPr>
@@ -1037,7 +1037,7 @@
           <p:cNvPr id="4" name="02 Section subtitle 0">
             <a:extLst xmlns:a="http://schemas.openxmlformats.org/drawingml/2006/main">
               <a:ext uri="{FF2B5EF4-FFF2-40B4-BE49-F238E27FC236}">
-                <a16:creationId xmlns:a16="http://schemas.microsoft.com/office/drawing/2014/main" id="{FB514B1D-F4B8-4847-8F1A-CA42E347F5B5}"/>
+                <a16:creationId xmlns:a16="http://schemas.microsoft.com/office/drawing/2014/main" id="{5322B42C-6040-4ABA-90EF-31F477BB60BA}"/>
               </a:ext>
             </a:extLst>
           </p:cNvPr>
@@ -1086,7 +1086,7 @@
           <p:cNvPr id="2" name="03 Content background">
             <a:extLst xmlns:a="http://schemas.openxmlformats.org/drawingml/2006/main">
               <a:ext uri="{FF2B5EF4-FFF2-40B4-BE49-F238E27FC236}">
-                <a16:creationId xmlns:a16="http://schemas.microsoft.com/office/drawing/2014/main" id="{7ED3B95D-8FE7-4968-B712-FE708CDD0BF6}"/>
+                <a16:creationId xmlns:a16="http://schemas.microsoft.com/office/drawing/2014/main" id="{7F9F8C07-A0AC-48F8-B61F-97E41627DFEB}"/>
               </a:ext>
             </a:extLst>
           </p:cNvPr>
@@ -1117,7 +1117,7 @@
           <p:cNvPr id="3" name="03 Content title 0">
             <a:extLst xmlns:a="http://schemas.openxmlformats.org/drawingml/2006/main">
               <a:ext uri="{FF2B5EF4-FFF2-40B4-BE49-F238E27FC236}">
-                <a16:creationId xmlns:a16="http://schemas.microsoft.com/office/drawing/2014/main" id="{72BC0AA3-4ED9-4D71-985F-71B9BDC08780}"/>
+                <a16:creationId xmlns:a16="http://schemas.microsoft.com/office/drawing/2014/main" id="{BCB2EE4C-F1F1-4836-A310-E46D2A30BB1B}"/>
               </a:ext>
             </a:extLst>
           </p:cNvPr>
@@ -1149,7 +1149,7 @@
           <p:cNvPr id="4" name="03 Content body 0">
             <a:extLst xmlns:a="http://schemas.openxmlformats.org/drawingml/2006/main">
               <a:ext uri="{FF2B5EF4-FFF2-40B4-BE49-F238E27FC236}">
-                <a16:creationId xmlns:a16="http://schemas.microsoft.com/office/drawing/2014/main" id="{A7324F3D-274C-41C9-B338-854BE6816875}"/>
+                <a16:creationId xmlns:a16="http://schemas.microsoft.com/office/drawing/2014/main" id="{11C80E7E-7FD8-4DBD-88D7-C43B60764A94}"/>
               </a:ext>
             </a:extLst>
           </p:cNvPr>
@@ -1198,7 +1198,7 @@
           <p:cNvPr id="2" name="04 Evidence background">
             <a:extLst xmlns:a="http://schemas.openxmlformats.org/drawingml/2006/main">
               <a:ext uri="{FF2B5EF4-FFF2-40B4-BE49-F238E27FC236}">
-                <a16:creationId xmlns:a16="http://schemas.microsoft.com/office/drawing/2014/main" id="{E9C31031-3E0C-4130-8043-984E7903AC95}"/>
+                <a16:creationId xmlns:a16="http://schemas.microsoft.com/office/drawing/2014/main" id="{A5DCF67C-F758-43B0-801D-24F57BC8BF3D}"/>
               </a:ext>
             </a:extLst>
           </p:cNvPr>
@@ -1229,7 +1229,7 @@
           <p:cNvPr id="3" name="04 Evidence title 0">
             <a:extLst xmlns:a="http://schemas.openxmlformats.org/drawingml/2006/main">
               <a:ext uri="{FF2B5EF4-FFF2-40B4-BE49-F238E27FC236}">
-                <a16:creationId xmlns:a16="http://schemas.microsoft.com/office/drawing/2014/main" id="{C146698E-ACAA-4943-A3E5-1315D955BE34}"/>
+                <a16:creationId xmlns:a16="http://schemas.microsoft.com/office/drawing/2014/main" id="{E1280BB3-D9E8-4BA6-9B36-63BAAF448504}"/>
               </a:ext>
             </a:extLst>
           </p:cNvPr>
@@ -1261,7 +1261,7 @@
           <p:cNvPr id="4" name="04 Evidence body 0">
             <a:extLst xmlns:a="http://schemas.openxmlformats.org/drawingml/2006/main">
               <a:ext uri="{FF2B5EF4-FFF2-40B4-BE49-F238E27FC236}">
-                <a16:creationId xmlns:a16="http://schemas.microsoft.com/office/drawing/2014/main" id="{E0005D27-DB61-4F49-9C44-234E5D423383}"/>
+                <a16:creationId xmlns:a16="http://schemas.microsoft.com/office/drawing/2014/main" id="{3E159866-27F1-4CCD-B0A1-0AC1A5DD49B7}"/>
               </a:ext>
             </a:extLst>
           </p:cNvPr>
@@ -1310,7 +1310,7 @@
           <p:cNvPr id="2" name="05 Quote background">
             <a:extLst xmlns:a="http://schemas.openxmlformats.org/drawingml/2006/main">
               <a:ext uri="{FF2B5EF4-FFF2-40B4-BE49-F238E27FC236}">
-                <a16:creationId xmlns:a16="http://schemas.microsoft.com/office/drawing/2014/main" id="{19DCFB01-1575-4792-A813-E72F8E0C3B98}"/>
+                <a16:creationId xmlns:a16="http://schemas.microsoft.com/office/drawing/2014/main" id="{2A0E099F-CD73-40FC-8121-B2F928723302}"/>
               </a:ext>
             </a:extLst>
           </p:cNvPr>
@@ -1341,7 +1341,7 @@
           <p:cNvPr id="3" name="05 Quote title 0">
             <a:extLst xmlns:a="http://schemas.openxmlformats.org/drawingml/2006/main">
               <a:ext uri="{FF2B5EF4-FFF2-40B4-BE49-F238E27FC236}">
-                <a16:creationId xmlns:a16="http://schemas.microsoft.com/office/drawing/2014/main" id="{85D59962-CE85-42B3-9C4B-EFDD25E041F8}"/>
+                <a16:creationId xmlns:a16="http://schemas.microsoft.com/office/drawing/2014/main" id="{D2308308-4797-4869-BD71-B1F06B4CE1E3}"/>
               </a:ext>
             </a:extLst>
           </p:cNvPr>
@@ -1373,7 +1373,7 @@
           <p:cNvPr id="4" name="05 Quote subtitle 0">
             <a:extLst xmlns:a="http://schemas.openxmlformats.org/drawingml/2006/main">
               <a:ext uri="{FF2B5EF4-FFF2-40B4-BE49-F238E27FC236}">
-                <a16:creationId xmlns:a16="http://schemas.microsoft.com/office/drawing/2014/main" id="{29222345-0504-4777-878F-9FB257E05007}"/>
+                <a16:creationId xmlns:a16="http://schemas.microsoft.com/office/drawing/2014/main" id="{2180C620-042F-493A-B927-433946988AEB}"/>
               </a:ext>
             </a:extLst>
           </p:cNvPr>
@@ -1422,7 +1422,7 @@
           <p:cNvPr id="2" name="06 Closing background">
             <a:extLst xmlns:a="http://schemas.openxmlformats.org/drawingml/2006/main">
               <a:ext uri="{FF2B5EF4-FFF2-40B4-BE49-F238E27FC236}">
-                <a16:creationId xmlns:a16="http://schemas.microsoft.com/office/drawing/2014/main" id="{F181ABC6-0040-4A0E-9A70-A660456DEC79}"/>
+                <a16:creationId xmlns:a16="http://schemas.microsoft.com/office/drawing/2014/main" id="{EDEB5197-CFC6-48D0-9EDF-CAA675E5E477}"/>
               </a:ext>
             </a:extLst>
           </p:cNvPr>
@@ -1453,7 +1453,7 @@
           <p:cNvPr id="3" name="06 Closing title 0">
             <a:extLst xmlns:a="http://schemas.openxmlformats.org/drawingml/2006/main">
               <a:ext uri="{FF2B5EF4-FFF2-40B4-BE49-F238E27FC236}">
-                <a16:creationId xmlns:a16="http://schemas.microsoft.com/office/drawing/2014/main" id="{4ACD1FD7-AB90-41A3-9A70-827F7F65E693}"/>
+                <a16:creationId xmlns:a16="http://schemas.microsoft.com/office/drawing/2014/main" id="{93F9CA7A-0D34-4FDE-8FA0-683AF6C0EC9B}"/>
               </a:ext>
             </a:extLst>
           </p:cNvPr>
@@ -1485,7 +1485,7 @@
           <p:cNvPr id="4" name="06 Closing subtitle 0">
             <a:extLst xmlns:a="http://schemas.openxmlformats.org/drawingml/2006/main">
               <a:ext uri="{FF2B5EF4-FFF2-40B4-BE49-F238E27FC236}">
-                <a16:creationId xmlns:a16="http://schemas.microsoft.com/office/drawing/2014/main" id="{749EEF43-EA17-4A9B-9CBB-247833D4FCB3}"/>
+                <a16:creationId xmlns:a16="http://schemas.microsoft.com/office/drawing/2014/main" id="{09854151-F7B3-4A55-8A97-EF68ED76F977}"/>
               </a:ext>
             </a:extLst>
           </p:cNvPr>
@@ -1538,7 +1538,7 @@
   </p:cSld>
   <p:clrMap bg1="lt1" tx1="dk1" bg2="lt2" tx2="dk2" accent1="accent1" accent2="accent2" accent3="accent3" accent4="accent4" accent5="accent5" accent6="accent6" hlink="hlink" folHlink="folHlink"/>
   <p:sldLayoutIdLst>
-    <p:sldLayoutId xmlns:r="http://schemas.openxmlformats.org/officeDocument/2006/relationships" id="2147483649" r:id="R73bab002624943bf"/>
+    <p:sldLayoutId xmlns:r="http://schemas.openxmlformats.org/officeDocument/2006/relationships" id="2147483649" r:id="R7d97c24a072148eb"/>
   </p:sldLayoutIdLst>
   <p:txStyles>
     <p:titleStyle>
@@ -1836,12 +1836,12 @@
   </p:cSld>
   <p:clrMap bg1="lt1" tx1="dk1" bg2="lt2" tx2="dk2" accent1="accent1" accent2="accent2" accent3="accent3" accent4="accent4" accent5="accent5" accent6="accent6" hlink="hlink" folHlink="folHlink"/>
   <p:sldLayoutIdLst>
-    <p:sldLayoutId xmlns:r="http://schemas.openxmlformats.org/officeDocument/2006/relationships" id="2147483651" r:id="R7c5c4fe2533940cc"/>
-    <p:sldLayoutId xmlns:r="http://schemas.openxmlformats.org/officeDocument/2006/relationships" id="2147483652" r:id="R63a7d4fef0854b33"/>
-    <p:sldLayoutId xmlns:r="http://schemas.openxmlformats.org/officeDocument/2006/relationships" id="2147483653" r:id="Rb37fa3a30cf048fa"/>
-    <p:sldLayoutId xmlns:r="http://schemas.openxmlformats.org/officeDocument/2006/relationships" id="2147483654" r:id="R281aa6c221bd4334"/>
-    <p:sldLayoutId xmlns:r="http://schemas.openxmlformats.org/officeDocument/2006/relationships" id="2147483655" r:id="Rf103ff121b5e4b69"/>
-    <p:sldLayoutId xmlns:r="http://schemas.openxmlformats.org/officeDocument/2006/relationships" id="2147483656" r:id="Rd1a5a2b0305248ab"/>
+    <p:sldLayoutId xmlns:r="http://schemas.openxmlformats.org/officeDocument/2006/relationships" id="2147483651" r:id="Rd973bb9d8f194198"/>
+    <p:sldLayoutId xmlns:r="http://schemas.openxmlformats.org/officeDocument/2006/relationships" id="2147483652" r:id="R9a230717049340b3"/>
+    <p:sldLayoutId xmlns:r="http://schemas.openxmlformats.org/officeDocument/2006/relationships" id="2147483653" r:id="Ra91c406822394880"/>
+    <p:sldLayoutId xmlns:r="http://schemas.openxmlformats.org/officeDocument/2006/relationships" id="2147483654" r:id="R529407ce303f4369"/>
+    <p:sldLayoutId xmlns:r="http://schemas.openxmlformats.org/officeDocument/2006/relationships" id="2147483655" r:id="R7fd47b89f2d54f45"/>
+    <p:sldLayoutId xmlns:r="http://schemas.openxmlformats.org/officeDocument/2006/relationships" id="2147483656" r:id="R1a532921922542b9"/>
   </p:sldLayoutIdLst>
 </p:sldMaster>
 </file>
@@ -1849,7 +1849,7 @@
 <file path=ppt/slideMasters/theme/theme2.xml><?xml version="1.0" encoding="utf-8"?>
 <a:theme xmlns:a="http://schemas.openxmlformats.org/drawingml/2006/main" name="ChatGPT">
   <a:themeElements>
-    <a:clrScheme name="Maslow Brand OS 1.0.0">
+    <a:clrScheme name="Maslow Brand OS 1.0.1">
       <a:dk1>
         <a:srgbClr val="333333"/>
       </a:dk1>
@@ -1899,7 +1899,7 @@
         <a:cs typeface="Calibri"/>
       </a:minorFont>
     </a:fontScheme>
-    <a:fmtScheme name="Maslow Brand OS 1.0.0">
+    <a:fmtScheme name="Maslow Brand OS 1.0.1">
       <a:fillStyleLst>
         <a:solidFill>
           <a:schemeClr val="phClr"/>
@@ -2094,7 +2094,7 @@
 <file path=ppt/slideMasters/theme/theme3.xml><?xml version="1.0" encoding="utf-8"?>
 <a:theme xmlns:a="http://schemas.openxmlformats.org/drawingml/2006/main" name="ChatGPT">
   <a:themeElements>
-    <a:clrScheme name="Maslow Brand OS 1.0.0">
+    <a:clrScheme name="Maslow Brand OS 1.0.1">
       <a:dk1>
         <a:srgbClr val="333333"/>
       </a:dk1>
@@ -2144,7 +2144,7 @@
         <a:cs typeface="Calibri"/>
       </a:minorFont>
     </a:fontScheme>
-    <a:fmtScheme name="Maslow Brand OS 1.0.0">
+    <a:fmtScheme name="Maslow Brand OS 1.0.1">
       <a:fillStyleLst>
         <a:solidFill>
           <a:schemeClr val="phClr"/>
@@ -2357,20 +2357,20 @@
       </p:grpSpPr>
       <p:pic>
         <p:nvPicPr>
-          <p:cNvPr id="6" name="Maslow AI mark" title="Maslow AI mark in white" descr="Maslow AI mark in white"/>
+          <p:cNvPr id="5" name="Maslow AI mark" title="Maslow AI mark in white" descr="Maslow AI mark in white"/>
           <p:cNvPicPr>
             <a:picLocks xmlns:a="http://schemas.openxmlformats.org/drawingml/2006/main" noChangeAspect="1"/>
           </p:cNvPicPr>
           <p:nvPr/>
         </p:nvPicPr>
         <p:blipFill>
-          <a:blip xmlns:r="http://schemas.openxmlformats.org/officeDocument/2006/relationships" xmlns:a="http://schemas.openxmlformats.org/drawingml/2006/main" r:embed="R1a2b23f0e6744639"/>
+          <a:blip xmlns:r="http://schemas.openxmlformats.org/officeDocument/2006/relationships" xmlns:a="http://schemas.openxmlformats.org/drawingml/2006/main" r:embed="R2cdcb1c35cff427b"/>
           <a:stretch xmlns:a="http://schemas.openxmlformats.org/drawingml/2006/main"/>
         </p:blipFill>
         <p:spPr>
           <a:xfrm xmlns:a="http://schemas.openxmlformats.org/drawingml/2006/main">
-            <a:off x="876300" y="556016"/>
-            <a:ext cx="876300" cy="583419"/>
+            <a:off x="876300" y="593071"/>
+            <a:ext cx="2667000" cy="423582"/>
           </a:xfrm>
           <a:prstGeom xmlns:a="http://schemas.openxmlformats.org/drawingml/2006/main" prst="rect">
             <a:avLst/>
@@ -2379,22 +2379,22 @@
       </p:pic>
       <p:sp>
         <p:nvSpPr>
-          <p:cNvPr id="2" name="logo-label-dark">
-            <a:extLst xmlns:a="http://schemas.openxmlformats.org/drawingml/2006/main">
-              <a:ext uri="{FF2B5EF4-FFF2-40B4-BE49-F238E27FC236}">
-                <a16:creationId xmlns:a16="http://schemas.microsoft.com/office/drawing/2014/main" id="{E44AE119-EDAE-467A-AA66-39106CCBFE0D}"/>
-              </a:ext>
-            </a:extLst>
-          </p:cNvPr>
-          <p:cNvSpPr>
-            <a:spLocks xmlns:a="http://schemas.openxmlformats.org/drawingml/2006/main" noGrp="1"/>
-          </p:cNvSpPr>
-          <p:nvPr/>
-        </p:nvSpPr>
-        <p:spPr>
-          <a:xfrm xmlns:a="http://schemas.openxmlformats.org/drawingml/2006/main">
-            <a:off x="1885950" y="704850"/>
-            <a:ext cx="1619250" cy="247650"/>
+          <p:cNvPr id="2" name="title-eyebrow">
+            <a:extLst xmlns:a="http://schemas.openxmlformats.org/drawingml/2006/main">
+              <a:ext uri="{FF2B5EF4-FFF2-40B4-BE49-F238E27FC236}">
+                <a16:creationId xmlns:a16="http://schemas.microsoft.com/office/drawing/2014/main" id="{99F71A74-E167-476C-8010-7B5AF9B6365A}"/>
+              </a:ext>
+            </a:extLst>
+          </p:cNvPr>
+          <p:cNvSpPr>
+            <a:spLocks xmlns:a="http://schemas.openxmlformats.org/drawingml/2006/main" noGrp="1"/>
+          </p:cNvSpPr>
+          <p:nvPr/>
+        </p:nvSpPr>
+        <p:spPr>
+          <a:xfrm xmlns:a="http://schemas.openxmlformats.org/drawingml/2006/main">
+            <a:off x="876300" y="2266950"/>
+            <a:ext cx="6667500" cy="285750"/>
           </a:xfrm>
           <a:prstGeom xmlns:a="http://schemas.openxmlformats.org/drawingml/2006/main" prst="rect">
             <a:avLst/>
@@ -2410,66 +2410,14 @@
           <a:lstStyle xmlns:a="http://schemas.openxmlformats.org/drawingml/2006/main"/>
           <a:p xmlns:a="http://schemas.openxmlformats.org/drawingml/2006/main">
             <a:pPr>
-              <a:defRPr sz="900" b="1">
-                <a:solidFill>
-                  <a:srgbClr val="FFFFFF"/>
+              <a:defRPr sz="1125" b="1">
+                <a:solidFill>
+                  <a:srgbClr val="73C1AE"/>
                 </a:solidFill>
                 <a:latin typeface="IBM Plex Mono"/>
               </a:defRPr>
             </a:pPr>
             <a:r>
-              <a:rPr sz="900" b="1">
-                <a:solidFill>
-                  <a:srgbClr val="FFFFFF"/>
-                </a:solidFill>
-                <a:latin typeface="IBM Plex Mono"/>
-              </a:rPr>
-              <a:t>MASLOW AI</a:t>
-            </a:r>
-          </a:p>
-        </p:txBody>
-      </p:sp>
-      <p:sp>
-        <p:nvSpPr>
-          <p:cNvPr id="3" name="title-eyebrow">
-            <a:extLst xmlns:a="http://schemas.openxmlformats.org/drawingml/2006/main">
-              <a:ext uri="{FF2B5EF4-FFF2-40B4-BE49-F238E27FC236}">
-                <a16:creationId xmlns:a16="http://schemas.microsoft.com/office/drawing/2014/main" id="{A7CD996C-8D26-4B57-9CFA-205E29284904}"/>
-              </a:ext>
-            </a:extLst>
-          </p:cNvPr>
-          <p:cNvSpPr>
-            <a:spLocks xmlns:a="http://schemas.openxmlformats.org/drawingml/2006/main" noGrp="1"/>
-          </p:cNvSpPr>
-          <p:nvPr/>
-        </p:nvSpPr>
-        <p:spPr>
-          <a:xfrm xmlns:a="http://schemas.openxmlformats.org/drawingml/2006/main">
-            <a:off x="876300" y="2266950"/>
-            <a:ext cx="6667500" cy="285750"/>
-          </a:xfrm>
-          <a:prstGeom xmlns:a="http://schemas.openxmlformats.org/drawingml/2006/main" prst="rect">
-            <a:avLst/>
-          </a:prstGeom>
-          <a:noFill xmlns:a="http://schemas.openxmlformats.org/drawingml/2006/main"/>
-          <a:ln xmlns:a="http://schemas.openxmlformats.org/drawingml/2006/main" w="0">
-            <a:noFill/>
-            <a:prstDash val="solid"/>
-          </a:ln>
-        </p:spPr>
-        <p:txBody>
-          <a:bodyPr xmlns:a="http://schemas.openxmlformats.org/drawingml/2006/main"/>
-          <a:lstStyle xmlns:a="http://schemas.openxmlformats.org/drawingml/2006/main"/>
-          <a:p xmlns:a="http://schemas.openxmlformats.org/drawingml/2006/main">
-            <a:pPr>
-              <a:defRPr sz="1125" b="1">
-                <a:solidFill>
-                  <a:srgbClr val="73C1AE"/>
-                </a:solidFill>
-                <a:latin typeface="IBM Plex Mono"/>
-              </a:defRPr>
-            </a:pPr>
-            <a:r>
               <a:rPr sz="1125" b="1">
                 <a:solidFill>
                   <a:srgbClr val="73C1AE"/>
@@ -2483,10 +2431,10 @@
       </p:sp>
       <p:sp>
         <p:nvSpPr>
-          <p:cNvPr id="4" name="title-heading">
-            <a:extLst xmlns:a="http://schemas.openxmlformats.org/drawingml/2006/main">
-              <a:ext uri="{FF2B5EF4-FFF2-40B4-BE49-F238E27FC236}">
-                <a16:creationId xmlns:a16="http://schemas.microsoft.com/office/drawing/2014/main" id="{480E5C9D-FE82-4F2C-8063-D5A5B9022ED3}"/>
+          <p:cNvPr id="3" name="title-heading">
+            <a:extLst xmlns:a="http://schemas.openxmlformats.org/drawingml/2006/main">
+              <a:ext uri="{FF2B5EF4-FFF2-40B4-BE49-F238E27FC236}">
+                <a16:creationId xmlns:a16="http://schemas.microsoft.com/office/drawing/2014/main" id="{31646233-859A-4244-A136-7900F111232D}"/>
               </a:ext>
             </a:extLst>
           </p:cNvPr>
@@ -2535,10 +2483,10 @@
       </p:sp>
       <p:sp>
         <p:nvSpPr>
-          <p:cNvPr id="5" name="title-subtitle">
-            <a:extLst xmlns:a="http://schemas.openxmlformats.org/drawingml/2006/main">
-              <a:ext uri="{FF2B5EF4-FFF2-40B4-BE49-F238E27FC236}">
-                <a16:creationId xmlns:a16="http://schemas.microsoft.com/office/drawing/2014/main" id="{62BFC0EC-30DE-4C9F-950F-8827A3A44B8C}"/>
+          <p:cNvPr id="4" name="title-subtitle">
+            <a:extLst xmlns:a="http://schemas.openxmlformats.org/drawingml/2006/main">
+              <a:ext uri="{FF2B5EF4-FFF2-40B4-BE49-F238E27FC236}">
+                <a16:creationId xmlns:a16="http://schemas.microsoft.com/office/drawing/2014/main" id="{0011639B-DE51-4123-834C-DBCE9B4B9CA7}"/>
               </a:ext>
             </a:extLst>
           </p:cNvPr>
@@ -2588,7 +2536,7 @@
     </p:spTree>
     <p:extLst>
       <p:ext uri="{BB962C8B-B14F-4D97-AF65-F5344CB8AC3E}">
-        <p14:creationId xmlns:p14="http://schemas.microsoft.com/office/powerpoint/2010/main" val="1022351060"/>
+        <p14:creationId xmlns:p14="http://schemas.microsoft.com/office/powerpoint/2010/main" val="1882925185"/>
       </p:ext>
     </p:extLst>
   </p:cSld>
@@ -2619,7 +2567,7 @@
           <p:cNvPr id="5" name="section-step-marker">
             <a:extLst xmlns:a="http://schemas.openxmlformats.org/drawingml/2006/main">
               <a:ext uri="{FF2B5EF4-FFF2-40B4-BE49-F238E27FC236}">
-                <a16:creationId xmlns:a16="http://schemas.microsoft.com/office/drawing/2014/main" id="{28710129-1C75-473A-ACC4-5D4239197E9E}"/>
+                <a16:creationId xmlns:a16="http://schemas.microsoft.com/office/drawing/2014/main" id="{AD55BBA8-7F93-4129-83EC-48C12ACD8CB6}"/>
               </a:ext>
             </a:extLst>
           </p:cNvPr>
@@ -2671,7 +2619,7 @@
           <p:cNvPr id="2" name="section-eyebrow">
             <a:extLst xmlns:a="http://schemas.openxmlformats.org/drawingml/2006/main">
               <a:ext uri="{FF2B5EF4-FFF2-40B4-BE49-F238E27FC236}">
-                <a16:creationId xmlns:a16="http://schemas.microsoft.com/office/drawing/2014/main" id="{1AA277C5-A3B5-495A-BDF4-444E9B7BFDE0}"/>
+                <a16:creationId xmlns:a16="http://schemas.microsoft.com/office/drawing/2014/main" id="{F208CF53-CF68-472B-9C57-9FB4325AFABB}"/>
               </a:ext>
             </a:extLst>
           </p:cNvPr>
@@ -2723,7 +2671,7 @@
           <p:cNvPr id="3" name="section-heading">
             <a:extLst xmlns:a="http://schemas.openxmlformats.org/drawingml/2006/main">
               <a:ext uri="{FF2B5EF4-FFF2-40B4-BE49-F238E27FC236}">
-                <a16:creationId xmlns:a16="http://schemas.microsoft.com/office/drawing/2014/main" id="{BC192E49-7DB2-4B36-B698-08D01FD2E052}"/>
+                <a16:creationId xmlns:a16="http://schemas.microsoft.com/office/drawing/2014/main" id="{93392C02-5A2F-4C63-9104-67CDBAA200E5}"/>
               </a:ext>
             </a:extLst>
           </p:cNvPr>
@@ -2775,7 +2723,7 @@
           <p:cNvPr id="4" name="section-signal">
             <a:extLst xmlns:a="http://schemas.openxmlformats.org/drawingml/2006/main">
               <a:ext uri="{FF2B5EF4-FFF2-40B4-BE49-F238E27FC236}">
-                <a16:creationId xmlns:a16="http://schemas.microsoft.com/office/drawing/2014/main" id="{7744FDB6-D569-4EC6-8D51-4345DC0E7C0A}"/>
+                <a16:creationId xmlns:a16="http://schemas.microsoft.com/office/drawing/2014/main" id="{3F7D6E7E-A14E-4327-87A9-0B05C30ED350}"/>
               </a:ext>
             </a:extLst>
           </p:cNvPr>
@@ -2804,7 +2752,7 @@
     </p:spTree>
     <p:extLst>
       <p:ext uri="{BB962C8B-B14F-4D97-AF65-F5344CB8AC3E}">
-        <p14:creationId xmlns:p14="http://schemas.microsoft.com/office/powerpoint/2010/main" val="1206178680"/>
+        <p14:creationId xmlns:p14="http://schemas.microsoft.com/office/powerpoint/2010/main" val="2141496714"/>
       </p:ext>
     </p:extLst>
   </p:cSld>
@@ -2835,7 +2783,7 @@
           <p:cNvPr id="18" name="content-eyebrow">
             <a:extLst xmlns:a="http://schemas.openxmlformats.org/drawingml/2006/main">
               <a:ext uri="{FF2B5EF4-FFF2-40B4-BE49-F238E27FC236}">
-                <a16:creationId xmlns:a16="http://schemas.microsoft.com/office/drawing/2014/main" id="{6B79EFDE-E178-4057-B4F6-240D34E993CF}"/>
+                <a16:creationId xmlns:a16="http://schemas.microsoft.com/office/drawing/2014/main" id="{0D5223B6-DD73-4017-BE21-A5B24B1CB298}"/>
               </a:ext>
             </a:extLst>
           </p:cNvPr>
@@ -2887,7 +2835,7 @@
           <p:cNvPr id="2" name="content-heading">
             <a:extLst xmlns:a="http://schemas.openxmlformats.org/drawingml/2006/main">
               <a:ext uri="{FF2B5EF4-FFF2-40B4-BE49-F238E27FC236}">
-                <a16:creationId xmlns:a16="http://schemas.microsoft.com/office/drawing/2014/main" id="{6142708F-7DE2-487E-B670-CF782C3BB6D8}"/>
+                <a16:creationId xmlns:a16="http://schemas.microsoft.com/office/drawing/2014/main" id="{737FFC62-C064-4EE7-96FD-5F1CA68E6C16}"/>
               </a:ext>
             </a:extLst>
           </p:cNvPr>
@@ -2939,7 +2887,7 @@
           <p:cNvPr id="3" name="content-top-rule">
             <a:extLst xmlns:a="http://schemas.openxmlformats.org/drawingml/2006/main">
               <a:ext uri="{FF2B5EF4-FFF2-40B4-BE49-F238E27FC236}">
-                <a16:creationId xmlns:a16="http://schemas.microsoft.com/office/drawing/2014/main" id="{204BF55C-FDD5-4DB0-9F53-25CAC5D03A42}"/>
+                <a16:creationId xmlns:a16="http://schemas.microsoft.com/office/drawing/2014/main" id="{6B62B0EE-8E14-41CB-B6FC-C511C185E37C}"/>
               </a:ext>
             </a:extLst>
           </p:cNvPr>
@@ -2970,7 +2918,7 @@
           <p:cNvPr id="4" name="content-row-01-number">
             <a:extLst xmlns:a="http://schemas.openxmlformats.org/drawingml/2006/main">
               <a:ext uri="{FF2B5EF4-FFF2-40B4-BE49-F238E27FC236}">
-                <a16:creationId xmlns:a16="http://schemas.microsoft.com/office/drawing/2014/main" id="{A8285E33-054B-4578-A22E-258C3A9DA523}"/>
+                <a16:creationId xmlns:a16="http://schemas.microsoft.com/office/drawing/2014/main" id="{B88888EA-4018-4A7C-B9F7-5632012EB7DE}"/>
               </a:ext>
             </a:extLst>
           </p:cNvPr>
@@ -3022,7 +2970,7 @@
           <p:cNvPr id="5" name="content-row-01-heading">
             <a:extLst xmlns:a="http://schemas.openxmlformats.org/drawingml/2006/main">
               <a:ext uri="{FF2B5EF4-FFF2-40B4-BE49-F238E27FC236}">
-                <a16:creationId xmlns:a16="http://schemas.microsoft.com/office/drawing/2014/main" id="{2D0EFA7B-9F63-41C6-BAF5-E2AF160B173C}"/>
+                <a16:creationId xmlns:a16="http://schemas.microsoft.com/office/drawing/2014/main" id="{4E7D8B45-2D29-461A-A896-FB2200B071FC}"/>
               </a:ext>
             </a:extLst>
           </p:cNvPr>
@@ -3074,7 +3022,7 @@
           <p:cNvPr id="6" name="content-row-01-body">
             <a:extLst xmlns:a="http://schemas.openxmlformats.org/drawingml/2006/main">
               <a:ext uri="{FF2B5EF4-FFF2-40B4-BE49-F238E27FC236}">
-                <a16:creationId xmlns:a16="http://schemas.microsoft.com/office/drawing/2014/main" id="{74B7F650-D3EE-4B94-AD85-7B99795EA59F}"/>
+                <a16:creationId xmlns:a16="http://schemas.microsoft.com/office/drawing/2014/main" id="{4B8DE1C7-53A3-4A83-9618-1FB00874BAF7}"/>
               </a:ext>
             </a:extLst>
           </p:cNvPr>
@@ -3126,7 +3074,7 @@
           <p:cNvPr id="7" name="content-row-01-rule">
             <a:extLst xmlns:a="http://schemas.openxmlformats.org/drawingml/2006/main">
               <a:ext uri="{FF2B5EF4-FFF2-40B4-BE49-F238E27FC236}">
-                <a16:creationId xmlns:a16="http://schemas.microsoft.com/office/drawing/2014/main" id="{D6C9F527-233E-40A5-A897-8DD580D2CE9A}"/>
+                <a16:creationId xmlns:a16="http://schemas.microsoft.com/office/drawing/2014/main" id="{6D973334-A8AF-43DB-B84C-33A9D76D8557}"/>
               </a:ext>
             </a:extLst>
           </p:cNvPr>
@@ -3157,7 +3105,7 @@
           <p:cNvPr id="8" name="content-row-02-number">
             <a:extLst xmlns:a="http://schemas.openxmlformats.org/drawingml/2006/main">
               <a:ext uri="{FF2B5EF4-FFF2-40B4-BE49-F238E27FC236}">
-                <a16:creationId xmlns:a16="http://schemas.microsoft.com/office/drawing/2014/main" id="{9B8FFBBA-8233-4F4A-A4DA-A7605EF07C76}"/>
+                <a16:creationId xmlns:a16="http://schemas.microsoft.com/office/drawing/2014/main" id="{32A5436B-B71E-49C3-B497-F40052B30EB9}"/>
               </a:ext>
             </a:extLst>
           </p:cNvPr>
@@ -3209,7 +3157,7 @@
           <p:cNvPr id="9" name="content-row-02-heading">
             <a:extLst xmlns:a="http://schemas.openxmlformats.org/drawingml/2006/main">
               <a:ext uri="{FF2B5EF4-FFF2-40B4-BE49-F238E27FC236}">
-                <a16:creationId xmlns:a16="http://schemas.microsoft.com/office/drawing/2014/main" id="{E823F300-4772-4900-B5CF-2BE2EDD49709}"/>
+                <a16:creationId xmlns:a16="http://schemas.microsoft.com/office/drawing/2014/main" id="{38E6AB44-EB4B-400A-8CAC-9C1AD0609F30}"/>
               </a:ext>
             </a:extLst>
           </p:cNvPr>
@@ -3261,7 +3209,7 @@
           <p:cNvPr id="10" name="content-row-02-body">
             <a:extLst xmlns:a="http://schemas.openxmlformats.org/drawingml/2006/main">
               <a:ext uri="{FF2B5EF4-FFF2-40B4-BE49-F238E27FC236}">
-                <a16:creationId xmlns:a16="http://schemas.microsoft.com/office/drawing/2014/main" id="{0C04CCBF-6C4F-4F95-BB71-C920A45B6153}"/>
+                <a16:creationId xmlns:a16="http://schemas.microsoft.com/office/drawing/2014/main" id="{A6D7AD51-EDF7-4444-92F5-E8AC010AE3C8}"/>
               </a:ext>
             </a:extLst>
           </p:cNvPr>
@@ -3313,7 +3261,7 @@
           <p:cNvPr id="11" name="content-row-02-rule">
             <a:extLst xmlns:a="http://schemas.openxmlformats.org/drawingml/2006/main">
               <a:ext uri="{FF2B5EF4-FFF2-40B4-BE49-F238E27FC236}">
-                <a16:creationId xmlns:a16="http://schemas.microsoft.com/office/drawing/2014/main" id="{80CD5A9A-F3CA-49D8-8E14-E45721BA90C5}"/>
+                <a16:creationId xmlns:a16="http://schemas.microsoft.com/office/drawing/2014/main" id="{81799BFF-2538-4C75-A341-E2F80E1EDE98}"/>
               </a:ext>
             </a:extLst>
           </p:cNvPr>
@@ -3344,7 +3292,7 @@
           <p:cNvPr id="12" name="content-row-03-number">
             <a:extLst xmlns:a="http://schemas.openxmlformats.org/drawingml/2006/main">
               <a:ext uri="{FF2B5EF4-FFF2-40B4-BE49-F238E27FC236}">
-                <a16:creationId xmlns:a16="http://schemas.microsoft.com/office/drawing/2014/main" id="{7E85409F-724E-42FC-9A7F-8D94AA69768B}"/>
+                <a16:creationId xmlns:a16="http://schemas.microsoft.com/office/drawing/2014/main" id="{F73F4FC3-CB9F-414E-9C46-285479ADCBA9}"/>
               </a:ext>
             </a:extLst>
           </p:cNvPr>
@@ -3396,7 +3344,7 @@
           <p:cNvPr id="13" name="content-row-03-heading">
             <a:extLst xmlns:a="http://schemas.openxmlformats.org/drawingml/2006/main">
               <a:ext uri="{FF2B5EF4-FFF2-40B4-BE49-F238E27FC236}">
-                <a16:creationId xmlns:a16="http://schemas.microsoft.com/office/drawing/2014/main" id="{1189077E-4296-4A0C-BA27-54A79EC265F9}"/>
+                <a16:creationId xmlns:a16="http://schemas.microsoft.com/office/drawing/2014/main" id="{716EFD29-F2AC-4CAB-8324-1150B5920BDC}"/>
               </a:ext>
             </a:extLst>
           </p:cNvPr>
@@ -3448,7 +3396,7 @@
           <p:cNvPr id="14" name="content-row-03-body">
             <a:extLst xmlns:a="http://schemas.openxmlformats.org/drawingml/2006/main">
               <a:ext uri="{FF2B5EF4-FFF2-40B4-BE49-F238E27FC236}">
-                <a16:creationId xmlns:a16="http://schemas.microsoft.com/office/drawing/2014/main" id="{86EC748B-6D54-458C-AF53-4672C23891CE}"/>
+                <a16:creationId xmlns:a16="http://schemas.microsoft.com/office/drawing/2014/main" id="{B9B7D0A3-F198-46DA-BDE6-B1A182DD5E86}"/>
               </a:ext>
             </a:extLst>
           </p:cNvPr>
@@ -3500,7 +3448,7 @@
           <p:cNvPr id="15" name="content-row-03-rule">
             <a:extLst xmlns:a="http://schemas.openxmlformats.org/drawingml/2006/main">
               <a:ext uri="{FF2B5EF4-FFF2-40B4-BE49-F238E27FC236}">
-                <a16:creationId xmlns:a16="http://schemas.microsoft.com/office/drawing/2014/main" id="{E27D72FA-74BD-4191-9FF1-F4F758C2A6AE}"/>
+                <a16:creationId xmlns:a16="http://schemas.microsoft.com/office/drawing/2014/main" id="{D3E1FAB9-8632-4FDC-BCE4-E42B1E9C410A}"/>
               </a:ext>
             </a:extLst>
           </p:cNvPr>
@@ -3531,7 +3479,7 @@
           <p:cNvPr id="16" name="footer-wordmark-{{FOLIO}}">
             <a:extLst xmlns:a="http://schemas.openxmlformats.org/drawingml/2006/main">
               <a:ext uri="{FF2B5EF4-FFF2-40B4-BE49-F238E27FC236}">
-                <a16:creationId xmlns:a16="http://schemas.microsoft.com/office/drawing/2014/main" id="{DD195CB1-2344-4B00-BD30-E1FA65DF7C08}"/>
+                <a16:creationId xmlns:a16="http://schemas.microsoft.com/office/drawing/2014/main" id="{11AAF3E2-F08F-430E-A39E-D2BFF64BA687}"/>
               </a:ext>
             </a:extLst>
           </p:cNvPr>
@@ -3583,7 +3531,7 @@
           <p:cNvPr id="17" name="footer-folio-{{FOLIO}}">
             <a:extLst xmlns:a="http://schemas.openxmlformats.org/drawingml/2006/main">
               <a:ext uri="{FF2B5EF4-FFF2-40B4-BE49-F238E27FC236}">
-                <a16:creationId xmlns:a16="http://schemas.microsoft.com/office/drawing/2014/main" id="{BF1D997F-8C0D-4E79-B56E-F2045C6AB8DB}"/>
+                <a16:creationId xmlns:a16="http://schemas.microsoft.com/office/drawing/2014/main" id="{5641F44D-921B-48FE-85DE-3E4913C4B517}"/>
               </a:ext>
             </a:extLst>
           </p:cNvPr>
@@ -3633,7 +3581,7 @@
     </p:spTree>
     <p:extLst>
       <p:ext uri="{BB962C8B-B14F-4D97-AF65-F5344CB8AC3E}">
-        <p14:creationId xmlns:p14="http://schemas.microsoft.com/office/powerpoint/2010/main" val="2047765761"/>
+        <p14:creationId xmlns:p14="http://schemas.microsoft.com/office/powerpoint/2010/main" val="831887995"/>
       </p:ext>
     </p:extLst>
   </p:cSld>
@@ -3664,7 +3612,7 @@
           <p:cNvPr id="17" name="evidence-eyebrow">
             <a:extLst xmlns:a="http://schemas.openxmlformats.org/drawingml/2006/main">
               <a:ext uri="{FF2B5EF4-FFF2-40B4-BE49-F238E27FC236}">
-                <a16:creationId xmlns:a16="http://schemas.microsoft.com/office/drawing/2014/main" id="{8857A4A1-84C0-4AEC-8CD7-FEBF72BE7C79}"/>
+                <a16:creationId xmlns:a16="http://schemas.microsoft.com/office/drawing/2014/main" id="{352D84A6-9542-45F0-8336-F8A39D125E4D}"/>
               </a:ext>
             </a:extLst>
           </p:cNvPr>
@@ -3716,7 +3664,7 @@
           <p:cNvPr id="2" name="evidence-heading">
             <a:extLst xmlns:a="http://schemas.openxmlformats.org/drawingml/2006/main">
               <a:ext uri="{FF2B5EF4-FFF2-40B4-BE49-F238E27FC236}">
-                <a16:creationId xmlns:a16="http://schemas.microsoft.com/office/drawing/2014/main" id="{AB224822-78A4-4710-87D1-BC8E1EB4F5C4}"/>
+                <a16:creationId xmlns:a16="http://schemas.microsoft.com/office/drawing/2014/main" id="{F123CA54-F15E-494D-BFBE-A516C7D265DE}"/>
               </a:ext>
             </a:extLst>
           </p:cNvPr>
@@ -3768,7 +3716,7 @@
           <p:cNvPr id="3" name="evidence-ONE-rule">
             <a:extLst xmlns:a="http://schemas.openxmlformats.org/drawingml/2006/main">
               <a:ext uri="{FF2B5EF4-FFF2-40B4-BE49-F238E27FC236}">
-                <a16:creationId xmlns:a16="http://schemas.microsoft.com/office/drawing/2014/main" id="{EE592CC6-D40B-4B24-A2AD-E0026668AFFF}"/>
+                <a16:creationId xmlns:a16="http://schemas.microsoft.com/office/drawing/2014/main" id="{0FC2C9AF-FDE6-49AC-9B4D-AE12060784AA}"/>
               </a:ext>
             </a:extLst>
           </p:cNvPr>
@@ -3799,7 +3747,7 @@
           <p:cNvPr id="4" name="evidence-ONE-value">
             <a:extLst xmlns:a="http://schemas.openxmlformats.org/drawingml/2006/main">
               <a:ext uri="{FF2B5EF4-FFF2-40B4-BE49-F238E27FC236}">
-                <a16:creationId xmlns:a16="http://schemas.microsoft.com/office/drawing/2014/main" id="{0A9BF385-69BA-4709-AA9D-9F072BFCD07E}"/>
+                <a16:creationId xmlns:a16="http://schemas.microsoft.com/office/drawing/2014/main" id="{B231D88F-0D01-4531-AE04-E8A73DEACE4F}"/>
               </a:ext>
             </a:extLst>
           </p:cNvPr>
@@ -3851,7 +3799,7 @@
           <p:cNvPr id="5" name="evidence-ONE-claim">
             <a:extLst xmlns:a="http://schemas.openxmlformats.org/drawingml/2006/main">
               <a:ext uri="{FF2B5EF4-FFF2-40B4-BE49-F238E27FC236}">
-                <a16:creationId xmlns:a16="http://schemas.microsoft.com/office/drawing/2014/main" id="{DC645109-A478-4F08-B321-097C9C20DBEE}"/>
+                <a16:creationId xmlns:a16="http://schemas.microsoft.com/office/drawing/2014/main" id="{9DCA84E9-A792-4A8F-A96F-7C28884F31D0}"/>
               </a:ext>
             </a:extLst>
           </p:cNvPr>
@@ -3903,7 +3851,7 @@
           <p:cNvPr id="6" name="evidence-ONE-source">
             <a:extLst xmlns:a="http://schemas.openxmlformats.org/drawingml/2006/main">
               <a:ext uri="{FF2B5EF4-FFF2-40B4-BE49-F238E27FC236}">
-                <a16:creationId xmlns:a16="http://schemas.microsoft.com/office/drawing/2014/main" id="{400A246A-ACF1-43FE-8E74-72F7D1B01FD5}"/>
+                <a16:creationId xmlns:a16="http://schemas.microsoft.com/office/drawing/2014/main" id="{05D802AA-EAE5-4145-94A8-4FB739A2073F}"/>
               </a:ext>
             </a:extLst>
           </p:cNvPr>
@@ -3955,7 +3903,7 @@
           <p:cNvPr id="7" name="evidence-TWO-rule">
             <a:extLst xmlns:a="http://schemas.openxmlformats.org/drawingml/2006/main">
               <a:ext uri="{FF2B5EF4-FFF2-40B4-BE49-F238E27FC236}">
-                <a16:creationId xmlns:a16="http://schemas.microsoft.com/office/drawing/2014/main" id="{BEF70166-0672-4C49-B763-4BAD078507AD}"/>
+                <a16:creationId xmlns:a16="http://schemas.microsoft.com/office/drawing/2014/main" id="{CC191A94-EB60-46BA-805A-C05F96921C81}"/>
               </a:ext>
             </a:extLst>
           </p:cNvPr>
@@ -3986,7 +3934,7 @@
           <p:cNvPr id="8" name="evidence-TWO-value">
             <a:extLst xmlns:a="http://schemas.openxmlformats.org/drawingml/2006/main">
               <a:ext uri="{FF2B5EF4-FFF2-40B4-BE49-F238E27FC236}">
-                <a16:creationId xmlns:a16="http://schemas.microsoft.com/office/drawing/2014/main" id="{8ED04079-9CCB-4F18-8174-5ECF01EDE479}"/>
+                <a16:creationId xmlns:a16="http://schemas.microsoft.com/office/drawing/2014/main" id="{0CF6BC14-7B30-402B-9891-B0C95DDAC6A4}"/>
               </a:ext>
             </a:extLst>
           </p:cNvPr>
@@ -4038,7 +3986,7 @@
           <p:cNvPr id="9" name="evidence-TWO-claim">
             <a:extLst xmlns:a="http://schemas.openxmlformats.org/drawingml/2006/main">
               <a:ext uri="{FF2B5EF4-FFF2-40B4-BE49-F238E27FC236}">
-                <a16:creationId xmlns:a16="http://schemas.microsoft.com/office/drawing/2014/main" id="{A7403A84-1DC7-4264-96DF-ED236AAA6977}"/>
+                <a16:creationId xmlns:a16="http://schemas.microsoft.com/office/drawing/2014/main" id="{1CB389BD-E19D-4027-A0C6-DAB482F92265}"/>
               </a:ext>
             </a:extLst>
           </p:cNvPr>
@@ -4090,7 +4038,7 @@
           <p:cNvPr id="10" name="evidence-TWO-source">
             <a:extLst xmlns:a="http://schemas.openxmlformats.org/drawingml/2006/main">
               <a:ext uri="{FF2B5EF4-FFF2-40B4-BE49-F238E27FC236}">
-                <a16:creationId xmlns:a16="http://schemas.microsoft.com/office/drawing/2014/main" id="{C34F0BB8-10E5-47CF-B33D-4FC0C122013B}"/>
+                <a16:creationId xmlns:a16="http://schemas.microsoft.com/office/drawing/2014/main" id="{9CF7FAA5-00D2-4C4D-B1E7-2F41CA152B88}"/>
               </a:ext>
             </a:extLst>
           </p:cNvPr>
@@ -4142,7 +4090,7 @@
           <p:cNvPr id="11" name="evidence-THREE-rule">
             <a:extLst xmlns:a="http://schemas.openxmlformats.org/drawingml/2006/main">
               <a:ext uri="{FF2B5EF4-FFF2-40B4-BE49-F238E27FC236}">
-                <a16:creationId xmlns:a16="http://schemas.microsoft.com/office/drawing/2014/main" id="{092E61A8-29E8-423B-8187-339F49D8BB99}"/>
+                <a16:creationId xmlns:a16="http://schemas.microsoft.com/office/drawing/2014/main" id="{03B06C39-B132-48E1-ABA6-E5152E546A2E}"/>
               </a:ext>
             </a:extLst>
           </p:cNvPr>
@@ -4173,7 +4121,7 @@
           <p:cNvPr id="12" name="evidence-THREE-value">
             <a:extLst xmlns:a="http://schemas.openxmlformats.org/drawingml/2006/main">
               <a:ext uri="{FF2B5EF4-FFF2-40B4-BE49-F238E27FC236}">
-                <a16:creationId xmlns:a16="http://schemas.microsoft.com/office/drawing/2014/main" id="{E9B17FAB-A230-4C25-9630-A1A02A847371}"/>
+                <a16:creationId xmlns:a16="http://schemas.microsoft.com/office/drawing/2014/main" id="{F0D72208-C347-403A-968E-8258109A3D81}"/>
               </a:ext>
             </a:extLst>
           </p:cNvPr>
@@ -4225,7 +4173,7 @@
           <p:cNvPr id="13" name="evidence-THREE-claim">
             <a:extLst xmlns:a="http://schemas.openxmlformats.org/drawingml/2006/main">
               <a:ext uri="{FF2B5EF4-FFF2-40B4-BE49-F238E27FC236}">
-                <a16:creationId xmlns:a16="http://schemas.microsoft.com/office/drawing/2014/main" id="{64A232A6-3C64-4D45-BA85-E41ECD2B131E}"/>
+                <a16:creationId xmlns:a16="http://schemas.microsoft.com/office/drawing/2014/main" id="{7B0BD031-F80B-4E4B-9D4D-2D20AD01929B}"/>
               </a:ext>
             </a:extLst>
           </p:cNvPr>
@@ -4277,7 +4225,7 @@
           <p:cNvPr id="14" name="evidence-THREE-source">
             <a:extLst xmlns:a="http://schemas.openxmlformats.org/drawingml/2006/main">
               <a:ext uri="{FF2B5EF4-FFF2-40B4-BE49-F238E27FC236}">
-                <a16:creationId xmlns:a16="http://schemas.microsoft.com/office/drawing/2014/main" id="{AFDC3DCD-ACF0-40E7-85C9-84C23AF6EC34}"/>
+                <a16:creationId xmlns:a16="http://schemas.microsoft.com/office/drawing/2014/main" id="{5618261F-4260-4065-8510-1FAA854E17A5}"/>
               </a:ext>
             </a:extLst>
           </p:cNvPr>
@@ -4329,7 +4277,7 @@
           <p:cNvPr id="15" name="footer-wordmark-{{FOLIO}}">
             <a:extLst xmlns:a="http://schemas.openxmlformats.org/drawingml/2006/main">
               <a:ext uri="{FF2B5EF4-FFF2-40B4-BE49-F238E27FC236}">
-                <a16:creationId xmlns:a16="http://schemas.microsoft.com/office/drawing/2014/main" id="{2D0EEC48-BCFF-44D2-BFA8-929AFB6B3C16}"/>
+                <a16:creationId xmlns:a16="http://schemas.microsoft.com/office/drawing/2014/main" id="{4FF82409-51D1-4B3C-9C36-4751857882CD}"/>
               </a:ext>
             </a:extLst>
           </p:cNvPr>
@@ -4381,7 +4329,7 @@
           <p:cNvPr id="16" name="footer-folio-{{FOLIO}}">
             <a:extLst xmlns:a="http://schemas.openxmlformats.org/drawingml/2006/main">
               <a:ext uri="{FF2B5EF4-FFF2-40B4-BE49-F238E27FC236}">
-                <a16:creationId xmlns:a16="http://schemas.microsoft.com/office/drawing/2014/main" id="{C8477759-A4B8-46B1-ACD4-680534F17AE9}"/>
+                <a16:creationId xmlns:a16="http://schemas.microsoft.com/office/drawing/2014/main" id="{26D94D81-867F-4C2D-A25E-F35004ACAD8C}"/>
               </a:ext>
             </a:extLst>
           </p:cNvPr>
@@ -4431,7 +4379,7 @@
     </p:spTree>
     <p:extLst>
       <p:ext uri="{BB962C8B-B14F-4D97-AF65-F5344CB8AC3E}">
-        <p14:creationId xmlns:p14="http://schemas.microsoft.com/office/powerpoint/2010/main" val="60549500"/>
+        <p14:creationId xmlns:p14="http://schemas.microsoft.com/office/powerpoint/2010/main" val="1028773350"/>
       </p:ext>
     </p:extLst>
   </p:cSld>
@@ -4462,7 +4410,7 @@
           <p:cNvPr id="5" name="quote-mark">
             <a:extLst xmlns:a="http://schemas.openxmlformats.org/drawingml/2006/main">
               <a:ext uri="{FF2B5EF4-FFF2-40B4-BE49-F238E27FC236}">
-                <a16:creationId xmlns:a16="http://schemas.microsoft.com/office/drawing/2014/main" id="{3E4B8393-2793-4CFD-BF39-CBAC7356107C}"/>
+                <a16:creationId xmlns:a16="http://schemas.microsoft.com/office/drawing/2014/main" id="{6F660914-D4DE-41BF-99A2-6926AF07C364}"/>
               </a:ext>
             </a:extLst>
           </p:cNvPr>
@@ -4514,7 +4462,7 @@
           <p:cNvPr id="2" name="quote-text">
             <a:extLst xmlns:a="http://schemas.openxmlformats.org/drawingml/2006/main">
               <a:ext uri="{FF2B5EF4-FFF2-40B4-BE49-F238E27FC236}">
-                <a16:creationId xmlns:a16="http://schemas.microsoft.com/office/drawing/2014/main" id="{680DDC9A-43A0-466B-BBB8-33C66E5360E1}"/>
+                <a16:creationId xmlns:a16="http://schemas.microsoft.com/office/drawing/2014/main" id="{E96CFE13-09E9-4513-A559-B6B6E6EFA17D}"/>
               </a:ext>
             </a:extLst>
           </p:cNvPr>
@@ -4566,7 +4514,7 @@
           <p:cNvPr id="3" name="quote-attribution">
             <a:extLst xmlns:a="http://schemas.openxmlformats.org/drawingml/2006/main">
               <a:ext uri="{FF2B5EF4-FFF2-40B4-BE49-F238E27FC236}">
-                <a16:creationId xmlns:a16="http://schemas.microsoft.com/office/drawing/2014/main" id="{9BDF5853-0C30-43D1-91F1-A49092DC2F3E}"/>
+                <a16:creationId xmlns:a16="http://schemas.microsoft.com/office/drawing/2014/main" id="{4CE8E4A2-590E-4BC7-A068-DAB49A5689AE}"/>
               </a:ext>
             </a:extLst>
           </p:cNvPr>
@@ -4618,7 +4566,7 @@
           <p:cNvPr id="4" name="quote-source">
             <a:extLst xmlns:a="http://schemas.openxmlformats.org/drawingml/2006/main">
               <a:ext uri="{FF2B5EF4-FFF2-40B4-BE49-F238E27FC236}">
-                <a16:creationId xmlns:a16="http://schemas.microsoft.com/office/drawing/2014/main" id="{CDC85B93-36D7-4619-9AA4-CE5C95571CED}"/>
+                <a16:creationId xmlns:a16="http://schemas.microsoft.com/office/drawing/2014/main" id="{BF3AEC30-8317-45B1-8777-029FB8E234C0}"/>
               </a:ext>
             </a:extLst>
           </p:cNvPr>
@@ -4668,7 +4616,7 @@
     </p:spTree>
     <p:extLst>
       <p:ext uri="{BB962C8B-B14F-4D97-AF65-F5344CB8AC3E}">
-        <p14:creationId xmlns:p14="http://schemas.microsoft.com/office/powerpoint/2010/main" val="1162015865"/>
+        <p14:creationId xmlns:p14="http://schemas.microsoft.com/office/powerpoint/2010/main" val="234050306"/>
       </p:ext>
     </p:extLst>
   </p:cSld>
@@ -4696,20 +4644,20 @@
       </p:grpSpPr>
       <p:pic>
         <p:nvPicPr>
-          <p:cNvPr id="10" name="Maslow AI mark" title="Maslow AI mark in navy" descr="Maslow AI mark in navy"/>
+          <p:cNvPr id="9" name="Maslow AI mark" title="Maslow AI mark in navy" descr="Maslow AI mark in navy"/>
           <p:cNvPicPr>
             <a:picLocks xmlns:a="http://schemas.openxmlformats.org/drawingml/2006/main" noChangeAspect="1"/>
           </p:cNvPicPr>
           <p:nvPr/>
         </p:nvPicPr>
         <p:blipFill>
-          <a:blip xmlns:r="http://schemas.openxmlformats.org/officeDocument/2006/relationships" xmlns:a="http://schemas.openxmlformats.org/drawingml/2006/main" r:embed="Rb0ed114441fe4953"/>
+          <a:blip xmlns:r="http://schemas.openxmlformats.org/officeDocument/2006/relationships" xmlns:a="http://schemas.openxmlformats.org/drawingml/2006/main" r:embed="R3843ee19ea54437a"/>
           <a:stretch xmlns:a="http://schemas.openxmlformats.org/drawingml/2006/main"/>
         </p:blipFill>
         <p:spPr>
           <a:xfrm xmlns:a="http://schemas.openxmlformats.org/drawingml/2006/main">
-            <a:off x="876300" y="556016"/>
-            <a:ext cx="876300" cy="583419"/>
+            <a:off x="876300" y="593071"/>
+            <a:ext cx="2667000" cy="423582"/>
           </a:xfrm>
           <a:prstGeom xmlns:a="http://schemas.openxmlformats.org/drawingml/2006/main" prst="rect">
             <a:avLst/>
@@ -4718,22 +4666,22 @@
       </p:pic>
       <p:sp>
         <p:nvSpPr>
-          <p:cNvPr id="2" name="logo-label-light">
-            <a:extLst xmlns:a="http://schemas.openxmlformats.org/drawingml/2006/main">
-              <a:ext uri="{FF2B5EF4-FFF2-40B4-BE49-F238E27FC236}">
-                <a16:creationId xmlns:a16="http://schemas.microsoft.com/office/drawing/2014/main" id="{9243FCD3-4818-42B2-B733-FB61B253B3C4}"/>
-              </a:ext>
-            </a:extLst>
-          </p:cNvPr>
-          <p:cNvSpPr>
-            <a:spLocks xmlns:a="http://schemas.openxmlformats.org/drawingml/2006/main" noGrp="1"/>
-          </p:cNvSpPr>
-          <p:nvPr/>
-        </p:nvSpPr>
-        <p:spPr>
-          <a:xfrm xmlns:a="http://schemas.openxmlformats.org/drawingml/2006/main">
-            <a:off x="1885950" y="704850"/>
-            <a:ext cx="1619250" cy="247650"/>
+          <p:cNvPr id="2" name="closing-heading">
+            <a:extLst xmlns:a="http://schemas.openxmlformats.org/drawingml/2006/main">
+              <a:ext uri="{FF2B5EF4-FFF2-40B4-BE49-F238E27FC236}">
+                <a16:creationId xmlns:a16="http://schemas.microsoft.com/office/drawing/2014/main" id="{2A634050-E264-4F3F-8414-CAA22E31032C}"/>
+              </a:ext>
+            </a:extLst>
+          </p:cNvPr>
+          <p:cNvSpPr>
+            <a:spLocks xmlns:a="http://schemas.openxmlformats.org/drawingml/2006/main" noGrp="1"/>
+          </p:cNvSpPr>
+          <p:nvPr/>
+        </p:nvSpPr>
+        <p:spPr>
+          <a:xfrm xmlns:a="http://schemas.openxmlformats.org/drawingml/2006/main">
+            <a:off x="876300" y="2133600"/>
+            <a:ext cx="10001250" cy="1428750"/>
           </a:xfrm>
           <a:prstGeom xmlns:a="http://schemas.openxmlformats.org/drawingml/2006/main" prst="rect">
             <a:avLst/>
@@ -4749,17 +4697,235 @@
           <a:lstStyle xmlns:a="http://schemas.openxmlformats.org/drawingml/2006/main"/>
           <a:p xmlns:a="http://schemas.openxmlformats.org/drawingml/2006/main">
             <a:pPr>
-              <a:defRPr sz="900" b="1">
+              <a:defRPr sz="3900" b="1">
                 <a:solidFill>
                   <a:srgbClr val="192332"/>
+                </a:solidFill>
+                <a:latin typeface="Manrope"/>
+              </a:defRPr>
+            </a:pPr>
+            <a:r>
+              <a:rPr sz="3900" b="1">
+                <a:solidFill>
+                  <a:srgbClr val="192332"/>
+                </a:solidFill>
+                <a:latin typeface="Manrope"/>
+              </a:rPr>
+              <a:t>{{NEXT_ACTION_HEADLINE}}</a:t>
+            </a:r>
+          </a:p>
+        </p:txBody>
+      </p:sp>
+      <p:sp>
+        <p:nvSpPr>
+          <p:cNvPr id="3" name="closing-action">
+            <a:extLst xmlns:a="http://schemas.openxmlformats.org/drawingml/2006/main">
+              <a:ext uri="{FF2B5EF4-FFF2-40B4-BE49-F238E27FC236}">
+                <a16:creationId xmlns:a16="http://schemas.microsoft.com/office/drawing/2014/main" id="{23A22B9D-B9A5-425C-A055-959E1AEDB82D}"/>
+              </a:ext>
+            </a:extLst>
+          </p:cNvPr>
+          <p:cNvSpPr>
+            <a:spLocks xmlns:a="http://schemas.openxmlformats.org/drawingml/2006/main" noGrp="1"/>
+          </p:cNvSpPr>
+          <p:nvPr/>
+        </p:nvSpPr>
+        <p:spPr>
+          <a:xfrm xmlns:a="http://schemas.openxmlformats.org/drawingml/2006/main">
+            <a:off x="876300" y="4038600"/>
+            <a:ext cx="4000500" cy="685800"/>
+          </a:xfrm>
+          <a:prstGeom xmlns:a="http://schemas.openxmlformats.org/drawingml/2006/main" prst="rect">
+            <a:avLst/>
+          </a:prstGeom>
+          <a:solidFill xmlns:a="http://schemas.openxmlformats.org/drawingml/2006/main">
+            <a:srgbClr val="192332"/>
+          </a:solidFill>
+          <a:ln xmlns:a="http://schemas.openxmlformats.org/drawingml/2006/main" w="0">
+            <a:noFill/>
+            <a:prstDash val="solid"/>
+          </a:ln>
+        </p:spPr>
+      </p:sp>
+      <p:sp>
+        <p:nvSpPr>
+          <p:cNvPr id="4" name="closing-action-label">
+            <a:extLst xmlns:a="http://schemas.openxmlformats.org/drawingml/2006/main">
+              <a:ext uri="{FF2B5EF4-FFF2-40B4-BE49-F238E27FC236}">
+                <a16:creationId xmlns:a16="http://schemas.microsoft.com/office/drawing/2014/main" id="{21FC4445-EEFB-4ACA-9047-88D810F4F4FB}"/>
+              </a:ext>
+            </a:extLst>
+          </p:cNvPr>
+          <p:cNvSpPr>
+            <a:spLocks xmlns:a="http://schemas.openxmlformats.org/drawingml/2006/main" noGrp="1"/>
+          </p:cNvSpPr>
+          <p:nvPr/>
+        </p:nvSpPr>
+        <p:spPr>
+          <a:xfrm xmlns:a="http://schemas.openxmlformats.org/drawingml/2006/main">
+            <a:off x="1143000" y="4248150"/>
+            <a:ext cx="3333750" cy="266700"/>
+          </a:xfrm>
+          <a:prstGeom xmlns:a="http://schemas.openxmlformats.org/drawingml/2006/main" prst="rect">
+            <a:avLst/>
+          </a:prstGeom>
+          <a:noFill xmlns:a="http://schemas.openxmlformats.org/drawingml/2006/main"/>
+          <a:ln xmlns:a="http://schemas.openxmlformats.org/drawingml/2006/main" w="0">
+            <a:noFill/>
+            <a:prstDash val="solid"/>
+          </a:ln>
+        </p:spPr>
+        <p:txBody>
+          <a:bodyPr xmlns:a="http://schemas.openxmlformats.org/drawingml/2006/main"/>
+          <a:lstStyle xmlns:a="http://schemas.openxmlformats.org/drawingml/2006/main"/>
+          <a:p xmlns:a="http://schemas.openxmlformats.org/drawingml/2006/main">
+            <a:pPr>
+              <a:defRPr sz="1200" b="1">
+                <a:solidFill>
+                  <a:srgbClr val="FFFFFF"/>
                 </a:solidFill>
                 <a:latin typeface="IBM Plex Mono"/>
               </a:defRPr>
             </a:pPr>
             <a:r>
+              <a:rPr sz="1200" b="1">
+                <a:solidFill>
+                  <a:srgbClr val="FFFFFF"/>
+                </a:solidFill>
+                <a:latin typeface="IBM Plex Mono"/>
+              </a:rPr>
+              <a:t>{{CTA_LABEL}}</a:t>
+            </a:r>
+          </a:p>
+        </p:txBody>
+      </p:sp>
+      <p:sp>
+        <p:nvSpPr>
+          <p:cNvPr id="5" name="closing-action-signal">
+            <a:extLst xmlns:a="http://schemas.openxmlformats.org/drawingml/2006/main">
+              <a:ext uri="{FF2B5EF4-FFF2-40B4-BE49-F238E27FC236}">
+                <a16:creationId xmlns:a16="http://schemas.microsoft.com/office/drawing/2014/main" id="{8FB60E6E-F4FA-48E9-8F27-A9C42E9ADF38}"/>
+              </a:ext>
+            </a:extLst>
+          </p:cNvPr>
+          <p:cNvSpPr>
+            <a:spLocks xmlns:a="http://schemas.openxmlformats.org/drawingml/2006/main" noGrp="1"/>
+          </p:cNvSpPr>
+          <p:nvPr/>
+        </p:nvSpPr>
+        <p:spPr>
+          <a:xfrm xmlns:a="http://schemas.openxmlformats.org/drawingml/2006/main">
+            <a:off x="876300" y="4686300"/>
+            <a:ext cx="457200" cy="38100"/>
+          </a:xfrm>
+          <a:prstGeom xmlns:a="http://schemas.openxmlformats.org/drawingml/2006/main" prst="rect">
+            <a:avLst/>
+          </a:prstGeom>
+          <a:solidFill xmlns:a="http://schemas.openxmlformats.org/drawingml/2006/main">
+            <a:srgbClr val="EE7BB3"/>
+          </a:solidFill>
+          <a:ln xmlns:a="http://schemas.openxmlformats.org/drawingml/2006/main" w="0">
+            <a:noFill/>
+            <a:prstDash val="solid"/>
+          </a:ln>
+        </p:spPr>
+      </p:sp>
+      <p:sp>
+        <p:nvSpPr>
+          <p:cNvPr id="6" name="closing-contact">
+            <a:extLst xmlns:a="http://schemas.openxmlformats.org/drawingml/2006/main">
+              <a:ext uri="{FF2B5EF4-FFF2-40B4-BE49-F238E27FC236}">
+                <a16:creationId xmlns:a16="http://schemas.microsoft.com/office/drawing/2014/main" id="{D043A3E9-F40F-4C73-A401-98744FE863F6}"/>
+              </a:ext>
+            </a:extLst>
+          </p:cNvPr>
+          <p:cNvSpPr>
+            <a:spLocks xmlns:a="http://schemas.openxmlformats.org/drawingml/2006/main" noGrp="1"/>
+          </p:cNvSpPr>
+          <p:nvPr/>
+        </p:nvSpPr>
+        <p:spPr>
+          <a:xfrm xmlns:a="http://schemas.openxmlformats.org/drawingml/2006/main">
+            <a:off x="876300" y="5105400"/>
+            <a:ext cx="6667500" cy="323850"/>
+          </a:xfrm>
+          <a:prstGeom xmlns:a="http://schemas.openxmlformats.org/drawingml/2006/main" prst="rect">
+            <a:avLst/>
+          </a:prstGeom>
+          <a:noFill xmlns:a="http://schemas.openxmlformats.org/drawingml/2006/main"/>
+          <a:ln xmlns:a="http://schemas.openxmlformats.org/drawingml/2006/main" w="0">
+            <a:noFill/>
+            <a:prstDash val="solid"/>
+          </a:ln>
+        </p:spPr>
+        <p:txBody>
+          <a:bodyPr xmlns:a="http://schemas.openxmlformats.org/drawingml/2006/main"/>
+          <a:lstStyle xmlns:a="http://schemas.openxmlformats.org/drawingml/2006/main"/>
+          <a:p xmlns:a="http://schemas.openxmlformats.org/drawingml/2006/main">
+            <a:pPr>
+              <a:defRPr sz="975">
+                <a:solidFill>
+                  <a:srgbClr val="666666"/>
+                </a:solidFill>
+                <a:latin typeface="IBM Plex Mono"/>
+              </a:defRPr>
+            </a:pPr>
+            <a:r>
+              <a:rPr sz="975">
+                <a:solidFill>
+                  <a:srgbClr val="666666"/>
+                </a:solidFill>
+                <a:latin typeface="IBM Plex Mono"/>
+              </a:rPr>
+              <a:t>{{CONTACT}}</a:t>
+            </a:r>
+          </a:p>
+        </p:txBody>
+      </p:sp>
+      <p:sp>
+        <p:nvSpPr>
+          <p:cNvPr id="7" name="footer-wordmark-{{FOLIO}}">
+            <a:extLst xmlns:a="http://schemas.openxmlformats.org/drawingml/2006/main">
+              <a:ext uri="{FF2B5EF4-FFF2-40B4-BE49-F238E27FC236}">
+                <a16:creationId xmlns:a16="http://schemas.microsoft.com/office/drawing/2014/main" id="{A97EBE9E-852B-4921-A9C6-4C508BC0A9BA}"/>
+              </a:ext>
+            </a:extLst>
+          </p:cNvPr>
+          <p:cNvSpPr>
+            <a:spLocks xmlns:a="http://schemas.openxmlformats.org/drawingml/2006/main" noGrp="1"/>
+          </p:cNvSpPr>
+          <p:nvPr/>
+        </p:nvSpPr>
+        <p:spPr>
+          <a:xfrm xmlns:a="http://schemas.openxmlformats.org/drawingml/2006/main">
+            <a:off x="876300" y="6362700"/>
+            <a:ext cx="1714500" cy="228600"/>
+          </a:xfrm>
+          <a:prstGeom xmlns:a="http://schemas.openxmlformats.org/drawingml/2006/main" prst="rect">
+            <a:avLst/>
+          </a:prstGeom>
+          <a:noFill xmlns:a="http://schemas.openxmlformats.org/drawingml/2006/main"/>
+          <a:ln xmlns:a="http://schemas.openxmlformats.org/drawingml/2006/main" w="0">
+            <a:noFill/>
+            <a:prstDash val="solid"/>
+          </a:ln>
+        </p:spPr>
+        <p:txBody>
+          <a:bodyPr xmlns:a="http://schemas.openxmlformats.org/drawingml/2006/main"/>
+          <a:lstStyle xmlns:a="http://schemas.openxmlformats.org/drawingml/2006/main"/>
+          <a:p xmlns:a="http://schemas.openxmlformats.org/drawingml/2006/main">
+            <a:pPr>
+              <a:defRPr sz="900" b="1">
+                <a:solidFill>
+                  <a:srgbClr val="A5A5A5"/>
+                </a:solidFill>
+                <a:latin typeface="IBM Plex Mono"/>
+              </a:defRPr>
+            </a:pPr>
+            <a:r>
               <a:rPr sz="900" b="1">
                 <a:solidFill>
-                  <a:srgbClr val="192332"/>
+                  <a:srgbClr val="A5A5A5"/>
                 </a:solidFill>
                 <a:latin typeface="IBM Plex Mono"/>
               </a:rPr>
@@ -4770,22 +4936,22 @@
       </p:sp>
       <p:sp>
         <p:nvSpPr>
-          <p:cNvPr id="3" name="closing-heading">
-            <a:extLst xmlns:a="http://schemas.openxmlformats.org/drawingml/2006/main">
-              <a:ext uri="{FF2B5EF4-FFF2-40B4-BE49-F238E27FC236}">
-                <a16:creationId xmlns:a16="http://schemas.microsoft.com/office/drawing/2014/main" id="{BD6577BE-E055-4971-B4C1-870AD3B84435}"/>
-              </a:ext>
-            </a:extLst>
-          </p:cNvPr>
-          <p:cNvSpPr>
-            <a:spLocks xmlns:a="http://schemas.openxmlformats.org/drawingml/2006/main" noGrp="1"/>
-          </p:cNvSpPr>
-          <p:nvPr/>
-        </p:nvSpPr>
-        <p:spPr>
-          <a:xfrm xmlns:a="http://schemas.openxmlformats.org/drawingml/2006/main">
-            <a:off x="876300" y="2133600"/>
-            <a:ext cx="10001250" cy="1428750"/>
+          <p:cNvPr id="8" name="footer-folio-{{FOLIO}}">
+            <a:extLst xmlns:a="http://schemas.openxmlformats.org/drawingml/2006/main">
+              <a:ext uri="{FF2B5EF4-FFF2-40B4-BE49-F238E27FC236}">
+                <a16:creationId xmlns:a16="http://schemas.microsoft.com/office/drawing/2014/main" id="{9F98C0B3-0D3B-41CE-BFA8-5FC727431EC5}"/>
+              </a:ext>
+            </a:extLst>
+          </p:cNvPr>
+          <p:cNvSpPr>
+            <a:spLocks xmlns:a="http://schemas.openxmlformats.org/drawingml/2006/main" noGrp="1"/>
+          </p:cNvSpPr>
+          <p:nvPr/>
+        </p:nvSpPr>
+        <p:spPr>
+          <a:xfrm xmlns:a="http://schemas.openxmlformats.org/drawingml/2006/main">
+            <a:off x="9601200" y="6362700"/>
+            <a:ext cx="1714500" cy="228600"/>
           </a:xfrm>
           <a:prstGeom xmlns:a="http://schemas.openxmlformats.org/drawingml/2006/main" prst="rect">
             <a:avLst/>
@@ -4800,285 +4966,15 @@
           <a:bodyPr xmlns:a="http://schemas.openxmlformats.org/drawingml/2006/main"/>
           <a:lstStyle xmlns:a="http://schemas.openxmlformats.org/drawingml/2006/main"/>
           <a:p xmlns:a="http://schemas.openxmlformats.org/drawingml/2006/main">
-            <a:pPr>
-              <a:defRPr sz="3900" b="1">
-                <a:solidFill>
-                  <a:srgbClr val="192332"/>
-                </a:solidFill>
-                <a:latin typeface="Manrope"/>
-              </a:defRPr>
-            </a:pPr>
-            <a:r>
-              <a:rPr sz="3900" b="1">
-                <a:solidFill>
-                  <a:srgbClr val="192332"/>
-                </a:solidFill>
-                <a:latin typeface="Manrope"/>
-              </a:rPr>
-              <a:t>{{NEXT_ACTION_HEADLINE}}</a:t>
-            </a:r>
-          </a:p>
-        </p:txBody>
-      </p:sp>
-      <p:sp>
-        <p:nvSpPr>
-          <p:cNvPr id="4" name="closing-action">
-            <a:extLst xmlns:a="http://schemas.openxmlformats.org/drawingml/2006/main">
-              <a:ext uri="{FF2B5EF4-FFF2-40B4-BE49-F238E27FC236}">
-                <a16:creationId xmlns:a16="http://schemas.microsoft.com/office/drawing/2014/main" id="{5A092CE0-7484-4904-8315-F808301C8C08}"/>
-              </a:ext>
-            </a:extLst>
-          </p:cNvPr>
-          <p:cNvSpPr>
-            <a:spLocks xmlns:a="http://schemas.openxmlformats.org/drawingml/2006/main" noGrp="1"/>
-          </p:cNvSpPr>
-          <p:nvPr/>
-        </p:nvSpPr>
-        <p:spPr>
-          <a:xfrm xmlns:a="http://schemas.openxmlformats.org/drawingml/2006/main">
-            <a:off x="876300" y="4038600"/>
-            <a:ext cx="4000500" cy="685800"/>
-          </a:xfrm>
-          <a:prstGeom xmlns:a="http://schemas.openxmlformats.org/drawingml/2006/main" prst="rect">
-            <a:avLst/>
-          </a:prstGeom>
-          <a:solidFill xmlns:a="http://schemas.openxmlformats.org/drawingml/2006/main">
-            <a:srgbClr val="192332"/>
-          </a:solidFill>
-          <a:ln xmlns:a="http://schemas.openxmlformats.org/drawingml/2006/main" w="0">
-            <a:noFill/>
-            <a:prstDash val="solid"/>
-          </a:ln>
-        </p:spPr>
-      </p:sp>
-      <p:sp>
-        <p:nvSpPr>
-          <p:cNvPr id="5" name="closing-action-label">
-            <a:extLst xmlns:a="http://schemas.openxmlformats.org/drawingml/2006/main">
-              <a:ext uri="{FF2B5EF4-FFF2-40B4-BE49-F238E27FC236}">
-                <a16:creationId xmlns:a16="http://schemas.microsoft.com/office/drawing/2014/main" id="{520606EC-CB03-46D1-9FC0-B1B85538B9BB}"/>
-              </a:ext>
-            </a:extLst>
-          </p:cNvPr>
-          <p:cNvSpPr>
-            <a:spLocks xmlns:a="http://schemas.openxmlformats.org/drawingml/2006/main" noGrp="1"/>
-          </p:cNvSpPr>
-          <p:nvPr/>
-        </p:nvSpPr>
-        <p:spPr>
-          <a:xfrm xmlns:a="http://schemas.openxmlformats.org/drawingml/2006/main">
-            <a:off x="1143000" y="4248150"/>
-            <a:ext cx="3333750" cy="266700"/>
-          </a:xfrm>
-          <a:prstGeom xmlns:a="http://schemas.openxmlformats.org/drawingml/2006/main" prst="rect">
-            <a:avLst/>
-          </a:prstGeom>
-          <a:noFill xmlns:a="http://schemas.openxmlformats.org/drawingml/2006/main"/>
-          <a:ln xmlns:a="http://schemas.openxmlformats.org/drawingml/2006/main" w="0">
-            <a:noFill/>
-            <a:prstDash val="solid"/>
-          </a:ln>
-        </p:spPr>
-        <p:txBody>
-          <a:bodyPr xmlns:a="http://schemas.openxmlformats.org/drawingml/2006/main"/>
-          <a:lstStyle xmlns:a="http://schemas.openxmlformats.org/drawingml/2006/main"/>
-          <a:p xmlns:a="http://schemas.openxmlformats.org/drawingml/2006/main">
-            <a:pPr>
-              <a:defRPr sz="1200" b="1">
-                <a:solidFill>
-                  <a:srgbClr val="FFFFFF"/>
+            <a:pPr algn="r">
+              <a:defRPr sz="825">
+                <a:solidFill>
+                  <a:srgbClr val="A5A5A5"/>
                 </a:solidFill>
                 <a:latin typeface="IBM Plex Mono"/>
               </a:defRPr>
             </a:pPr>
             <a:r>
-              <a:rPr sz="1200" b="1">
-                <a:solidFill>
-                  <a:srgbClr val="FFFFFF"/>
-                </a:solidFill>
-                <a:latin typeface="IBM Plex Mono"/>
-              </a:rPr>
-              <a:t>{{CTA_LABEL}}</a:t>
-            </a:r>
-          </a:p>
-        </p:txBody>
-      </p:sp>
-      <p:sp>
-        <p:nvSpPr>
-          <p:cNvPr id="6" name="closing-action-signal">
-            <a:extLst xmlns:a="http://schemas.openxmlformats.org/drawingml/2006/main">
-              <a:ext uri="{FF2B5EF4-FFF2-40B4-BE49-F238E27FC236}">
-                <a16:creationId xmlns:a16="http://schemas.microsoft.com/office/drawing/2014/main" id="{1E0A8806-7B5A-46AA-B4F2-29A7890E1ADD}"/>
-              </a:ext>
-            </a:extLst>
-          </p:cNvPr>
-          <p:cNvSpPr>
-            <a:spLocks xmlns:a="http://schemas.openxmlformats.org/drawingml/2006/main" noGrp="1"/>
-          </p:cNvSpPr>
-          <p:nvPr/>
-        </p:nvSpPr>
-        <p:spPr>
-          <a:xfrm xmlns:a="http://schemas.openxmlformats.org/drawingml/2006/main">
-            <a:off x="876300" y="4686300"/>
-            <a:ext cx="457200" cy="38100"/>
-          </a:xfrm>
-          <a:prstGeom xmlns:a="http://schemas.openxmlformats.org/drawingml/2006/main" prst="rect">
-            <a:avLst/>
-          </a:prstGeom>
-          <a:solidFill xmlns:a="http://schemas.openxmlformats.org/drawingml/2006/main">
-            <a:srgbClr val="EE7BB3"/>
-          </a:solidFill>
-          <a:ln xmlns:a="http://schemas.openxmlformats.org/drawingml/2006/main" w="0">
-            <a:noFill/>
-            <a:prstDash val="solid"/>
-          </a:ln>
-        </p:spPr>
-      </p:sp>
-      <p:sp>
-        <p:nvSpPr>
-          <p:cNvPr id="7" name="closing-contact">
-            <a:extLst xmlns:a="http://schemas.openxmlformats.org/drawingml/2006/main">
-              <a:ext uri="{FF2B5EF4-FFF2-40B4-BE49-F238E27FC236}">
-                <a16:creationId xmlns:a16="http://schemas.microsoft.com/office/drawing/2014/main" id="{8B7792E9-0BFE-44B1-B7CE-286051927D49}"/>
-              </a:ext>
-            </a:extLst>
-          </p:cNvPr>
-          <p:cNvSpPr>
-            <a:spLocks xmlns:a="http://schemas.openxmlformats.org/drawingml/2006/main" noGrp="1"/>
-          </p:cNvSpPr>
-          <p:nvPr/>
-        </p:nvSpPr>
-        <p:spPr>
-          <a:xfrm xmlns:a="http://schemas.openxmlformats.org/drawingml/2006/main">
-            <a:off x="876300" y="5105400"/>
-            <a:ext cx="6667500" cy="323850"/>
-          </a:xfrm>
-          <a:prstGeom xmlns:a="http://schemas.openxmlformats.org/drawingml/2006/main" prst="rect">
-            <a:avLst/>
-          </a:prstGeom>
-          <a:noFill xmlns:a="http://schemas.openxmlformats.org/drawingml/2006/main"/>
-          <a:ln xmlns:a="http://schemas.openxmlformats.org/drawingml/2006/main" w="0">
-            <a:noFill/>
-            <a:prstDash val="solid"/>
-          </a:ln>
-        </p:spPr>
-        <p:txBody>
-          <a:bodyPr xmlns:a="http://schemas.openxmlformats.org/drawingml/2006/main"/>
-          <a:lstStyle xmlns:a="http://schemas.openxmlformats.org/drawingml/2006/main"/>
-          <a:p xmlns:a="http://schemas.openxmlformats.org/drawingml/2006/main">
-            <a:pPr>
-              <a:defRPr sz="975">
-                <a:solidFill>
-                  <a:srgbClr val="666666"/>
-                </a:solidFill>
-                <a:latin typeface="IBM Plex Mono"/>
-              </a:defRPr>
-            </a:pPr>
-            <a:r>
-              <a:rPr sz="975">
-                <a:solidFill>
-                  <a:srgbClr val="666666"/>
-                </a:solidFill>
-                <a:latin typeface="IBM Plex Mono"/>
-              </a:rPr>
-              <a:t>{{CONTACT}}</a:t>
-            </a:r>
-          </a:p>
-        </p:txBody>
-      </p:sp>
-      <p:sp>
-        <p:nvSpPr>
-          <p:cNvPr id="8" name="footer-wordmark-{{FOLIO}}">
-            <a:extLst xmlns:a="http://schemas.openxmlformats.org/drawingml/2006/main">
-              <a:ext uri="{FF2B5EF4-FFF2-40B4-BE49-F238E27FC236}">
-                <a16:creationId xmlns:a16="http://schemas.microsoft.com/office/drawing/2014/main" id="{ED819426-192B-452A-91F5-211F1A3DB34F}"/>
-              </a:ext>
-            </a:extLst>
-          </p:cNvPr>
-          <p:cNvSpPr>
-            <a:spLocks xmlns:a="http://schemas.openxmlformats.org/drawingml/2006/main" noGrp="1"/>
-          </p:cNvSpPr>
-          <p:nvPr/>
-        </p:nvSpPr>
-        <p:spPr>
-          <a:xfrm xmlns:a="http://schemas.openxmlformats.org/drawingml/2006/main">
-            <a:off x="876300" y="6362700"/>
-            <a:ext cx="1714500" cy="228600"/>
-          </a:xfrm>
-          <a:prstGeom xmlns:a="http://schemas.openxmlformats.org/drawingml/2006/main" prst="rect">
-            <a:avLst/>
-          </a:prstGeom>
-          <a:noFill xmlns:a="http://schemas.openxmlformats.org/drawingml/2006/main"/>
-          <a:ln xmlns:a="http://schemas.openxmlformats.org/drawingml/2006/main" w="0">
-            <a:noFill/>
-            <a:prstDash val="solid"/>
-          </a:ln>
-        </p:spPr>
-        <p:txBody>
-          <a:bodyPr xmlns:a="http://schemas.openxmlformats.org/drawingml/2006/main"/>
-          <a:lstStyle xmlns:a="http://schemas.openxmlformats.org/drawingml/2006/main"/>
-          <a:p xmlns:a="http://schemas.openxmlformats.org/drawingml/2006/main">
-            <a:pPr>
-              <a:defRPr sz="900" b="1">
-                <a:solidFill>
-                  <a:srgbClr val="A5A5A5"/>
-                </a:solidFill>
-                <a:latin typeface="IBM Plex Mono"/>
-              </a:defRPr>
-            </a:pPr>
-            <a:r>
-              <a:rPr sz="900" b="1">
-                <a:solidFill>
-                  <a:srgbClr val="A5A5A5"/>
-                </a:solidFill>
-                <a:latin typeface="IBM Plex Mono"/>
-              </a:rPr>
-              <a:t>MASLOW AI</a:t>
-            </a:r>
-          </a:p>
-        </p:txBody>
-      </p:sp>
-      <p:sp>
-        <p:nvSpPr>
-          <p:cNvPr id="9" name="footer-folio-{{FOLIO}}">
-            <a:extLst xmlns:a="http://schemas.openxmlformats.org/drawingml/2006/main">
-              <a:ext uri="{FF2B5EF4-FFF2-40B4-BE49-F238E27FC236}">
-                <a16:creationId xmlns:a16="http://schemas.microsoft.com/office/drawing/2014/main" id="{08D46F1C-4DF3-40EF-B8C9-53C5A96E708A}"/>
-              </a:ext>
-            </a:extLst>
-          </p:cNvPr>
-          <p:cNvSpPr>
-            <a:spLocks xmlns:a="http://schemas.openxmlformats.org/drawingml/2006/main" noGrp="1"/>
-          </p:cNvSpPr>
-          <p:nvPr/>
-        </p:nvSpPr>
-        <p:spPr>
-          <a:xfrm xmlns:a="http://schemas.openxmlformats.org/drawingml/2006/main">
-            <a:off x="9601200" y="6362700"/>
-            <a:ext cx="1714500" cy="228600"/>
-          </a:xfrm>
-          <a:prstGeom xmlns:a="http://schemas.openxmlformats.org/drawingml/2006/main" prst="rect">
-            <a:avLst/>
-          </a:prstGeom>
-          <a:noFill xmlns:a="http://schemas.openxmlformats.org/drawingml/2006/main"/>
-          <a:ln xmlns:a="http://schemas.openxmlformats.org/drawingml/2006/main" w="0">
-            <a:noFill/>
-            <a:prstDash val="solid"/>
-          </a:ln>
-        </p:spPr>
-        <p:txBody>
-          <a:bodyPr xmlns:a="http://schemas.openxmlformats.org/drawingml/2006/main"/>
-          <a:lstStyle xmlns:a="http://schemas.openxmlformats.org/drawingml/2006/main"/>
-          <a:p xmlns:a="http://schemas.openxmlformats.org/drawingml/2006/main">
-            <a:pPr algn="r">
-              <a:defRPr sz="825">
-                <a:solidFill>
-                  <a:srgbClr val="A5A5A5"/>
-                </a:solidFill>
-                <a:latin typeface="IBM Plex Mono"/>
-              </a:defRPr>
-            </a:pPr>
-            <a:r>
               <a:rPr sz="825">
                 <a:solidFill>
                   <a:srgbClr val="A5A5A5"/>
@@ -5093,7 +4989,7 @@
     </p:spTree>
     <p:extLst>
       <p:ext uri="{BB962C8B-B14F-4D97-AF65-F5344CB8AC3E}">
-        <p14:creationId xmlns:p14="http://schemas.microsoft.com/office/powerpoint/2010/main" val="1025825783"/>
+        <p14:creationId xmlns:p14="http://schemas.microsoft.com/office/powerpoint/2010/main" val="1881869952"/>
       </p:ext>
     </p:extLst>
   </p:cSld>
@@ -5103,7 +4999,7 @@
 <file path=ppt/theme/theme1.xml><?xml version="1.0" encoding="utf-8"?>
 <a:theme xmlns:a="http://schemas.openxmlformats.org/drawingml/2006/main" name="ChatGPT">
   <a:themeElements>
-    <a:clrScheme name="Maslow Brand OS 1.0.0">
+    <a:clrScheme name="Maslow Brand OS 1.0.1">
       <a:dk1>
         <a:srgbClr val="333333"/>
       </a:dk1>
@@ -5153,7 +5049,7 @@
         <a:cs typeface="Calibri"/>
       </a:minorFont>
     </a:fontScheme>
-    <a:fmtScheme name="Maslow Brand OS 1.0.0">
+    <a:fmtScheme name="Maslow Brand OS 1.0.1">
       <a:fillStyleLst>
         <a:solidFill>
           <a:schemeClr val="phClr"/>

--- a/dist/claude/artifacts/pptx/maslow-brand-starter.pptx
+++ b/dist/claude/artifacts/pptx/maslow-brand-starter.pptx
@@ -2,19 +2,19 @@
 <file path=ppt/presentation.xml><?xml version="1.0" encoding="utf-8"?>
 <p:presentation xmlns:p="http://schemas.openxmlformats.org/presentationml/2006/main">
   <p:sldMasterIdLst>
-    <p:sldMasterId xmlns:r="http://schemas.openxmlformats.org/officeDocument/2006/relationships" id="2147483648" r:id="R13215d2ea8a84c87"/>
-    <p:sldMasterId xmlns:r="http://schemas.openxmlformats.org/officeDocument/2006/relationships" id="2147483650" r:id="R245d0709062441e0"/>
+    <p:sldMasterId xmlns:r="http://schemas.openxmlformats.org/officeDocument/2006/relationships" id="2147483648" r:id="rId9"/>
+    <p:sldMasterId xmlns:r="http://schemas.openxmlformats.org/officeDocument/2006/relationships" id="2147483650" r:id="rId10"/>
   </p:sldMasterIdLst>
   <p:notesMasterIdLst>
-    <p:notesMasterId xmlns:r="http://schemas.openxmlformats.org/officeDocument/2006/relationships" r:id="R558382e786ed4a34"/>
+    <p:notesMasterId xmlns:r="http://schemas.openxmlformats.org/officeDocument/2006/relationships" r:id="rId1"/>
   </p:notesMasterIdLst>
   <p:sldIdLst>
-    <p:sldId xmlns:r="http://schemas.openxmlformats.org/officeDocument/2006/relationships" id="256" r:id="R326351ff680b4e95"/>
-    <p:sldId xmlns:r="http://schemas.openxmlformats.org/officeDocument/2006/relationships" id="257" r:id="Rc71598d59a3f47ba"/>
-    <p:sldId xmlns:r="http://schemas.openxmlformats.org/officeDocument/2006/relationships" id="258" r:id="R563c14717ac942f3"/>
-    <p:sldId xmlns:r="http://schemas.openxmlformats.org/officeDocument/2006/relationships" id="259" r:id="R9e8785e836864ea0"/>
-    <p:sldId xmlns:r="http://schemas.openxmlformats.org/officeDocument/2006/relationships" id="260" r:id="R3a229730eab24a20"/>
-    <p:sldId xmlns:r="http://schemas.openxmlformats.org/officeDocument/2006/relationships" id="261" r:id="R8d3dade39a08428d"/>
+    <p:sldId xmlns:r="http://schemas.openxmlformats.org/officeDocument/2006/relationships" id="256" r:id="rId3"/>
+    <p:sldId xmlns:r="http://schemas.openxmlformats.org/officeDocument/2006/relationships" id="257" r:id="rId4"/>
+    <p:sldId xmlns:r="http://schemas.openxmlformats.org/officeDocument/2006/relationships" id="258" r:id="rId5"/>
+    <p:sldId xmlns:r="http://schemas.openxmlformats.org/officeDocument/2006/relationships" id="259" r:id="rId6"/>
+    <p:sldId xmlns:r="http://schemas.openxmlformats.org/officeDocument/2006/relationships" id="260" r:id="rId7"/>
+    <p:sldId xmlns:r="http://schemas.openxmlformats.org/officeDocument/2006/relationships" id="261" r:id="rId8"/>
   </p:sldIdLst>
   <p:sldSz cx="12192000" cy="6858000"/>
   <p:notesSz cx="6858000" cy="9144000"/>
@@ -862,7 +862,7 @@
           <p:cNvPr id="2" name="01 Title background">
             <a:extLst xmlns:a="http://schemas.openxmlformats.org/drawingml/2006/main">
               <a:ext uri="{FF2B5EF4-FFF2-40B4-BE49-F238E27FC236}">
-                <a16:creationId xmlns:a16="http://schemas.microsoft.com/office/drawing/2014/main" id="{EB4D7C85-668A-41D2-AC3D-60E9E01E5E29}"/>
+                <a16:creationId xmlns:a16="http://schemas.microsoft.com/office/drawing/2014/main" id="{310190F3-A5DF-55A3-B6C0-43AC89EE7FF6}"/>
               </a:ext>
             </a:extLst>
           </p:cNvPr>
@@ -893,7 +893,7 @@
           <p:cNvPr id="3" name="01 Title title 0">
             <a:extLst xmlns:a="http://schemas.openxmlformats.org/drawingml/2006/main">
               <a:ext uri="{FF2B5EF4-FFF2-40B4-BE49-F238E27FC236}">
-                <a16:creationId xmlns:a16="http://schemas.microsoft.com/office/drawing/2014/main" id="{E7B14ACC-DA14-495F-BE0B-E608E22D5082}"/>
+                <a16:creationId xmlns:a16="http://schemas.microsoft.com/office/drawing/2014/main" id="{BF3ECDF5-084E-5F6F-836E-EAA19091915D}"/>
               </a:ext>
             </a:extLst>
           </p:cNvPr>
@@ -925,7 +925,7 @@
           <p:cNvPr id="4" name="01 Title subtitle 0">
             <a:extLst xmlns:a="http://schemas.openxmlformats.org/drawingml/2006/main">
               <a:ext uri="{FF2B5EF4-FFF2-40B4-BE49-F238E27FC236}">
-                <a16:creationId xmlns:a16="http://schemas.microsoft.com/office/drawing/2014/main" id="{6F58992B-1316-470D-AB79-42B4F564DBFA}"/>
+                <a16:creationId xmlns:a16="http://schemas.microsoft.com/office/drawing/2014/main" id="{9790C2EA-1A6D-5ADB-A006-DB6933ACC03E}"/>
               </a:ext>
             </a:extLst>
           </p:cNvPr>
@@ -974,7 +974,7 @@
           <p:cNvPr id="2" name="02 Section background">
             <a:extLst xmlns:a="http://schemas.openxmlformats.org/drawingml/2006/main">
               <a:ext uri="{FF2B5EF4-FFF2-40B4-BE49-F238E27FC236}">
-                <a16:creationId xmlns:a16="http://schemas.microsoft.com/office/drawing/2014/main" id="{F178C535-3BBC-4018-ABAF-7C6CAC386C6F}"/>
+                <a16:creationId xmlns:a16="http://schemas.microsoft.com/office/drawing/2014/main" id="{3E2C7BFB-1C52-56BF-B6DE-6D4D2A8F3357}"/>
               </a:ext>
             </a:extLst>
           </p:cNvPr>
@@ -1005,7 +1005,7 @@
           <p:cNvPr id="3" name="02 Section title 0">
             <a:extLst xmlns:a="http://schemas.openxmlformats.org/drawingml/2006/main">
               <a:ext uri="{FF2B5EF4-FFF2-40B4-BE49-F238E27FC236}">
-                <a16:creationId xmlns:a16="http://schemas.microsoft.com/office/drawing/2014/main" id="{36DFB383-5A08-41E7-AE80-7C1B859FE15D}"/>
+                <a16:creationId xmlns:a16="http://schemas.microsoft.com/office/drawing/2014/main" id="{95004533-AA10-5A36-8A0C-F418CF157EA6}"/>
               </a:ext>
             </a:extLst>
           </p:cNvPr>
@@ -1037,7 +1037,7 @@
           <p:cNvPr id="4" name="02 Section subtitle 0">
             <a:extLst xmlns:a="http://schemas.openxmlformats.org/drawingml/2006/main">
               <a:ext uri="{FF2B5EF4-FFF2-40B4-BE49-F238E27FC236}">
-                <a16:creationId xmlns:a16="http://schemas.microsoft.com/office/drawing/2014/main" id="{D5EDC97B-F597-4050-B7B2-1D23C17B2DF0}"/>
+                <a16:creationId xmlns:a16="http://schemas.microsoft.com/office/drawing/2014/main" id="{66DAC599-2E9B-5E94-AD7D-6DF459FC0750}"/>
               </a:ext>
             </a:extLst>
           </p:cNvPr>
@@ -1086,7 +1086,7 @@
           <p:cNvPr id="2" name="03 Content background">
             <a:extLst xmlns:a="http://schemas.openxmlformats.org/drawingml/2006/main">
               <a:ext uri="{FF2B5EF4-FFF2-40B4-BE49-F238E27FC236}">
-                <a16:creationId xmlns:a16="http://schemas.microsoft.com/office/drawing/2014/main" id="{731A846E-CE61-4CA7-B193-5139979D9DEC}"/>
+                <a16:creationId xmlns:a16="http://schemas.microsoft.com/office/drawing/2014/main" id="{D87BB0D0-8F4A-525D-A2AB-E1D33D509886}"/>
               </a:ext>
             </a:extLst>
           </p:cNvPr>
@@ -1117,7 +1117,7 @@
           <p:cNvPr id="3" name="03 Content title 0">
             <a:extLst xmlns:a="http://schemas.openxmlformats.org/drawingml/2006/main">
               <a:ext uri="{FF2B5EF4-FFF2-40B4-BE49-F238E27FC236}">
-                <a16:creationId xmlns:a16="http://schemas.microsoft.com/office/drawing/2014/main" id="{15198248-69D5-4C64-A434-0B5CFAD3618E}"/>
+                <a16:creationId xmlns:a16="http://schemas.microsoft.com/office/drawing/2014/main" id="{ED38757D-C3CD-5DCE-871E-ACCF23CFA5C1}"/>
               </a:ext>
             </a:extLst>
           </p:cNvPr>
@@ -1149,7 +1149,7 @@
           <p:cNvPr id="4" name="03 Content body 0">
             <a:extLst xmlns:a="http://schemas.openxmlformats.org/drawingml/2006/main">
               <a:ext uri="{FF2B5EF4-FFF2-40B4-BE49-F238E27FC236}">
-                <a16:creationId xmlns:a16="http://schemas.microsoft.com/office/drawing/2014/main" id="{5E6F8993-86C8-4F4C-9DBB-BD42D6ACE205}"/>
+                <a16:creationId xmlns:a16="http://schemas.microsoft.com/office/drawing/2014/main" id="{2BC6FFDF-9EB8-5016-893F-129CF56C0857}"/>
               </a:ext>
             </a:extLst>
           </p:cNvPr>
@@ -1198,7 +1198,7 @@
           <p:cNvPr id="2" name="04 Evidence background">
             <a:extLst xmlns:a="http://schemas.openxmlformats.org/drawingml/2006/main">
               <a:ext uri="{FF2B5EF4-FFF2-40B4-BE49-F238E27FC236}">
-                <a16:creationId xmlns:a16="http://schemas.microsoft.com/office/drawing/2014/main" id="{0758F6B5-C353-4774-9154-FACCD766D7A4}"/>
+                <a16:creationId xmlns:a16="http://schemas.microsoft.com/office/drawing/2014/main" id="{7FD1B23C-9D80-5101-874D-7B6D1874093F}"/>
               </a:ext>
             </a:extLst>
           </p:cNvPr>
@@ -1229,7 +1229,7 @@
           <p:cNvPr id="3" name="04 Evidence title 0">
             <a:extLst xmlns:a="http://schemas.openxmlformats.org/drawingml/2006/main">
               <a:ext uri="{FF2B5EF4-FFF2-40B4-BE49-F238E27FC236}">
-                <a16:creationId xmlns:a16="http://schemas.microsoft.com/office/drawing/2014/main" id="{B8C182F0-C8B0-4068-9101-A7E8A11BF020}"/>
+                <a16:creationId xmlns:a16="http://schemas.microsoft.com/office/drawing/2014/main" id="{AC01EC95-7E27-5997-9017-60B8B43DC4EA}"/>
               </a:ext>
             </a:extLst>
           </p:cNvPr>
@@ -1261,7 +1261,7 @@
           <p:cNvPr id="4" name="04 Evidence body 0">
             <a:extLst xmlns:a="http://schemas.openxmlformats.org/drawingml/2006/main">
               <a:ext uri="{FF2B5EF4-FFF2-40B4-BE49-F238E27FC236}">
-                <a16:creationId xmlns:a16="http://schemas.microsoft.com/office/drawing/2014/main" id="{A47BF7E9-D575-4C7D-944C-8F4F99C472E6}"/>
+                <a16:creationId xmlns:a16="http://schemas.microsoft.com/office/drawing/2014/main" id="{718D0A01-D416-5145-BB47-B3087DCC0152}"/>
               </a:ext>
             </a:extLst>
           </p:cNvPr>
@@ -1310,7 +1310,7 @@
           <p:cNvPr id="2" name="05 Quote background">
             <a:extLst xmlns:a="http://schemas.openxmlformats.org/drawingml/2006/main">
               <a:ext uri="{FF2B5EF4-FFF2-40B4-BE49-F238E27FC236}">
-                <a16:creationId xmlns:a16="http://schemas.microsoft.com/office/drawing/2014/main" id="{D598B5B1-A1A4-4526-9394-CF2FF0E67653}"/>
+                <a16:creationId xmlns:a16="http://schemas.microsoft.com/office/drawing/2014/main" id="{EA03A625-C576-50B9-8010-5A09FC9133B1}"/>
               </a:ext>
             </a:extLst>
           </p:cNvPr>
@@ -1341,7 +1341,7 @@
           <p:cNvPr id="3" name="05 Quote title 0">
             <a:extLst xmlns:a="http://schemas.openxmlformats.org/drawingml/2006/main">
               <a:ext uri="{FF2B5EF4-FFF2-40B4-BE49-F238E27FC236}">
-                <a16:creationId xmlns:a16="http://schemas.microsoft.com/office/drawing/2014/main" id="{69C3E6D2-ECC0-43B0-B6AC-B8F62C781ACC}"/>
+                <a16:creationId xmlns:a16="http://schemas.microsoft.com/office/drawing/2014/main" id="{02AE9DC2-2DBC-50F9-94A3-242DB207F66C}"/>
               </a:ext>
             </a:extLst>
           </p:cNvPr>
@@ -1373,7 +1373,7 @@
           <p:cNvPr id="4" name="05 Quote subtitle 0">
             <a:extLst xmlns:a="http://schemas.openxmlformats.org/drawingml/2006/main">
               <a:ext uri="{FF2B5EF4-FFF2-40B4-BE49-F238E27FC236}">
-                <a16:creationId xmlns:a16="http://schemas.microsoft.com/office/drawing/2014/main" id="{DBA794BD-1D76-43E0-8F8E-D524533F188F}"/>
+                <a16:creationId xmlns:a16="http://schemas.microsoft.com/office/drawing/2014/main" id="{5EA47EC0-2F7A-5850-81B7-707BBB286343}"/>
               </a:ext>
             </a:extLst>
           </p:cNvPr>
@@ -1422,7 +1422,7 @@
           <p:cNvPr id="2" name="06 Closing background">
             <a:extLst xmlns:a="http://schemas.openxmlformats.org/drawingml/2006/main">
               <a:ext uri="{FF2B5EF4-FFF2-40B4-BE49-F238E27FC236}">
-                <a16:creationId xmlns:a16="http://schemas.microsoft.com/office/drawing/2014/main" id="{C933616D-92B3-47FD-8BF4-E781A2E8435B}"/>
+                <a16:creationId xmlns:a16="http://schemas.microsoft.com/office/drawing/2014/main" id="{EAD0AA3D-F242-5E86-9CAC-5B3BCEB5B2D3}"/>
               </a:ext>
             </a:extLst>
           </p:cNvPr>
@@ -1453,7 +1453,7 @@
           <p:cNvPr id="3" name="06 Closing title 0">
             <a:extLst xmlns:a="http://schemas.openxmlformats.org/drawingml/2006/main">
               <a:ext uri="{FF2B5EF4-FFF2-40B4-BE49-F238E27FC236}">
-                <a16:creationId xmlns:a16="http://schemas.microsoft.com/office/drawing/2014/main" id="{1A017F44-8778-4827-B646-C047CC491485}"/>
+                <a16:creationId xmlns:a16="http://schemas.microsoft.com/office/drawing/2014/main" id="{D5D0681F-10AE-52E1-AE2E-6204F99903F5}"/>
               </a:ext>
             </a:extLst>
           </p:cNvPr>
@@ -1485,7 +1485,7 @@
           <p:cNvPr id="4" name="06 Closing subtitle 0">
             <a:extLst xmlns:a="http://schemas.openxmlformats.org/drawingml/2006/main">
               <a:ext uri="{FF2B5EF4-FFF2-40B4-BE49-F238E27FC236}">
-                <a16:creationId xmlns:a16="http://schemas.microsoft.com/office/drawing/2014/main" id="{302CA6A2-A8C2-46D3-9EB9-32EEF1184654}"/>
+                <a16:creationId xmlns:a16="http://schemas.microsoft.com/office/drawing/2014/main" id="{885AD679-944C-568D-AFF3-6A3289FBC63C}"/>
               </a:ext>
             </a:extLst>
           </p:cNvPr>
@@ -1538,7 +1538,7 @@
   </p:cSld>
   <p:clrMap bg1="lt1" tx1="dk1" bg2="lt2" tx2="dk2" accent1="accent1" accent2="accent2" accent3="accent3" accent4="accent4" accent5="accent5" accent6="accent6" hlink="hlink" folHlink="folHlink"/>
   <p:sldLayoutIdLst>
-    <p:sldLayoutId xmlns:r="http://schemas.openxmlformats.org/officeDocument/2006/relationships" id="2147483649" r:id="R05691c50a44e4630"/>
+    <p:sldLayoutId xmlns:r="http://schemas.openxmlformats.org/officeDocument/2006/relationships" id="2147483649" r:id="rId1"/>
   </p:sldLayoutIdLst>
   <p:txStyles>
     <p:titleStyle>
@@ -1836,12 +1836,12 @@
   </p:cSld>
   <p:clrMap bg1="lt1" tx1="dk1" bg2="lt2" tx2="dk2" accent1="accent1" accent2="accent2" accent3="accent3" accent4="accent4" accent5="accent5" accent6="accent6" hlink="hlink" folHlink="folHlink"/>
   <p:sldLayoutIdLst>
-    <p:sldLayoutId xmlns:r="http://schemas.openxmlformats.org/officeDocument/2006/relationships" id="2147483651" r:id="R5a711c3fb7344553"/>
-    <p:sldLayoutId xmlns:r="http://schemas.openxmlformats.org/officeDocument/2006/relationships" id="2147483652" r:id="R9e6f3481a1564951"/>
-    <p:sldLayoutId xmlns:r="http://schemas.openxmlformats.org/officeDocument/2006/relationships" id="2147483653" r:id="R8b0301a4580e4f6c"/>
-    <p:sldLayoutId xmlns:r="http://schemas.openxmlformats.org/officeDocument/2006/relationships" id="2147483654" r:id="R8d6147402585481a"/>
-    <p:sldLayoutId xmlns:r="http://schemas.openxmlformats.org/officeDocument/2006/relationships" id="2147483655" r:id="R009bfbe0c2fd4a93"/>
-    <p:sldLayoutId xmlns:r="http://schemas.openxmlformats.org/officeDocument/2006/relationships" id="2147483656" r:id="Rad7985fafd674ef4"/>
+    <p:sldLayoutId xmlns:r="http://schemas.openxmlformats.org/officeDocument/2006/relationships" id="2147483651" r:id="rId1"/>
+    <p:sldLayoutId xmlns:r="http://schemas.openxmlformats.org/officeDocument/2006/relationships" id="2147483652" r:id="rId2"/>
+    <p:sldLayoutId xmlns:r="http://schemas.openxmlformats.org/officeDocument/2006/relationships" id="2147483653" r:id="rId3"/>
+    <p:sldLayoutId xmlns:r="http://schemas.openxmlformats.org/officeDocument/2006/relationships" id="2147483654" r:id="rId4"/>
+    <p:sldLayoutId xmlns:r="http://schemas.openxmlformats.org/officeDocument/2006/relationships" id="2147483655" r:id="rId5"/>
+    <p:sldLayoutId xmlns:r="http://schemas.openxmlformats.org/officeDocument/2006/relationships" id="2147483656" r:id="rId6"/>
   </p:sldLayoutIdLst>
 </p:sldMaster>
 </file>
@@ -2364,7 +2364,7 @@
           <p:nvPr/>
         </p:nvPicPr>
         <p:blipFill>
-          <a:blip xmlns:r="http://schemas.openxmlformats.org/officeDocument/2006/relationships" xmlns:a="http://schemas.openxmlformats.org/drawingml/2006/main" r:embed="Ra3c236d254574384"/>
+          <a:blip xmlns:r="http://schemas.openxmlformats.org/officeDocument/2006/relationships" xmlns:a="http://schemas.openxmlformats.org/drawingml/2006/main" r:embed="rId1"/>
           <a:stretch xmlns:a="http://schemas.openxmlformats.org/drawingml/2006/main"/>
         </p:blipFill>
         <p:spPr>
@@ -2382,7 +2382,7 @@
           <p:cNvPr id="2" name="title-eyebrow">
             <a:extLst xmlns:a="http://schemas.openxmlformats.org/drawingml/2006/main">
               <a:ext uri="{FF2B5EF4-FFF2-40B4-BE49-F238E27FC236}">
-                <a16:creationId xmlns:a16="http://schemas.microsoft.com/office/drawing/2014/main" id="{8A52EA43-166A-4F1C-A171-EDDF5504892A}"/>
+                <a16:creationId xmlns:a16="http://schemas.microsoft.com/office/drawing/2014/main" id="{EADA48C7-92E3-511D-8FB4-24D974404668}"/>
               </a:ext>
             </a:extLst>
           </p:cNvPr>
@@ -2434,7 +2434,7 @@
           <p:cNvPr id="3" name="title-heading">
             <a:extLst xmlns:a="http://schemas.openxmlformats.org/drawingml/2006/main">
               <a:ext uri="{FF2B5EF4-FFF2-40B4-BE49-F238E27FC236}">
-                <a16:creationId xmlns:a16="http://schemas.microsoft.com/office/drawing/2014/main" id="{604778BB-9345-4E8A-8D21-FBA910BA26C6}"/>
+                <a16:creationId xmlns:a16="http://schemas.microsoft.com/office/drawing/2014/main" id="{D34DE48F-E1F3-5F41-8DB7-BC6DF56A67AD}"/>
               </a:ext>
             </a:extLst>
           </p:cNvPr>
@@ -2486,7 +2486,7 @@
           <p:cNvPr id="4" name="title-subtitle">
             <a:extLst xmlns:a="http://schemas.openxmlformats.org/drawingml/2006/main">
               <a:ext uri="{FF2B5EF4-FFF2-40B4-BE49-F238E27FC236}">
-                <a16:creationId xmlns:a16="http://schemas.microsoft.com/office/drawing/2014/main" id="{0F7FC66C-FFD6-4FF4-B7A5-5B242A579262}"/>
+                <a16:creationId xmlns:a16="http://schemas.microsoft.com/office/drawing/2014/main" id="{BD1D932B-6ED0-533C-B450-F68AD75A6B25}"/>
               </a:ext>
             </a:extLst>
           </p:cNvPr>
@@ -2536,7 +2536,7 @@
     </p:spTree>
     <p:extLst>
       <p:ext uri="{BB962C8B-B14F-4D97-AF65-F5344CB8AC3E}">
-        <p14:creationId xmlns:p14="http://schemas.microsoft.com/office/powerpoint/2010/main" val="729140704"/>
+        <p14:creationId xmlns:p14="http://schemas.microsoft.com/office/powerpoint/2010/main" val="1456997942"/>
       </p:ext>
     </p:extLst>
   </p:cSld>
@@ -2567,7 +2567,7 @@
           <p:cNvPr id="5" name="section-step-marker">
             <a:extLst xmlns:a="http://schemas.openxmlformats.org/drawingml/2006/main">
               <a:ext uri="{FF2B5EF4-FFF2-40B4-BE49-F238E27FC236}">
-                <a16:creationId xmlns:a16="http://schemas.microsoft.com/office/drawing/2014/main" id="{2953F1B7-655C-4F1C-8FD3-F1C914C899DA}"/>
+                <a16:creationId xmlns:a16="http://schemas.microsoft.com/office/drawing/2014/main" id="{6A5B9837-AFB3-5A02-BECC-FA0DADC6F3AE}"/>
               </a:ext>
             </a:extLst>
           </p:cNvPr>
@@ -2619,7 +2619,7 @@
           <p:cNvPr id="2" name="section-eyebrow">
             <a:extLst xmlns:a="http://schemas.openxmlformats.org/drawingml/2006/main">
               <a:ext uri="{FF2B5EF4-FFF2-40B4-BE49-F238E27FC236}">
-                <a16:creationId xmlns:a16="http://schemas.microsoft.com/office/drawing/2014/main" id="{A389E2A9-ED82-4052-8358-E254F0B55085}"/>
+                <a16:creationId xmlns:a16="http://schemas.microsoft.com/office/drawing/2014/main" id="{E2BD8628-9B18-58EE-8A36-F197DC6E405E}"/>
               </a:ext>
             </a:extLst>
           </p:cNvPr>
@@ -2671,7 +2671,7 @@
           <p:cNvPr id="3" name="section-heading">
             <a:extLst xmlns:a="http://schemas.openxmlformats.org/drawingml/2006/main">
               <a:ext uri="{FF2B5EF4-FFF2-40B4-BE49-F238E27FC236}">
-                <a16:creationId xmlns:a16="http://schemas.microsoft.com/office/drawing/2014/main" id="{0600C217-C82F-4BAA-BFC3-8E5AC62AC1A8}"/>
+                <a16:creationId xmlns:a16="http://schemas.microsoft.com/office/drawing/2014/main" id="{63351BBF-6896-588A-B67F-E01E50DB21E2}"/>
               </a:ext>
             </a:extLst>
           </p:cNvPr>
@@ -2723,7 +2723,7 @@
           <p:cNvPr id="4" name="section-signal">
             <a:extLst xmlns:a="http://schemas.openxmlformats.org/drawingml/2006/main">
               <a:ext uri="{FF2B5EF4-FFF2-40B4-BE49-F238E27FC236}">
-                <a16:creationId xmlns:a16="http://schemas.microsoft.com/office/drawing/2014/main" id="{F6C73F5A-F299-4263-BDCB-6E23CA1958CE}"/>
+                <a16:creationId xmlns:a16="http://schemas.microsoft.com/office/drawing/2014/main" id="{CF629152-9524-59FC-8BD0-DF4258959489}"/>
               </a:ext>
             </a:extLst>
           </p:cNvPr>
@@ -2752,7 +2752,7 @@
     </p:spTree>
     <p:extLst>
       <p:ext uri="{BB962C8B-B14F-4D97-AF65-F5344CB8AC3E}">
-        <p14:creationId xmlns:p14="http://schemas.microsoft.com/office/powerpoint/2010/main" val="1915195615"/>
+        <p14:creationId xmlns:p14="http://schemas.microsoft.com/office/powerpoint/2010/main" val="1352405784"/>
       </p:ext>
     </p:extLst>
   </p:cSld>
@@ -2783,7 +2783,7 @@
           <p:cNvPr id="18" name="content-eyebrow">
             <a:extLst xmlns:a="http://schemas.openxmlformats.org/drawingml/2006/main">
               <a:ext uri="{FF2B5EF4-FFF2-40B4-BE49-F238E27FC236}">
-                <a16:creationId xmlns:a16="http://schemas.microsoft.com/office/drawing/2014/main" id="{A2A7C0C5-8ADA-4F68-A913-1E3556F5D037}"/>
+                <a16:creationId xmlns:a16="http://schemas.microsoft.com/office/drawing/2014/main" id="{49F4F1FB-1527-560E-9E0C-2D0431413614}"/>
               </a:ext>
             </a:extLst>
           </p:cNvPr>
@@ -2835,7 +2835,7 @@
           <p:cNvPr id="2" name="content-heading">
             <a:extLst xmlns:a="http://schemas.openxmlformats.org/drawingml/2006/main">
               <a:ext uri="{FF2B5EF4-FFF2-40B4-BE49-F238E27FC236}">
-                <a16:creationId xmlns:a16="http://schemas.microsoft.com/office/drawing/2014/main" id="{C488FB2E-4C96-4467-BF0C-FCF30F3040FD}"/>
+                <a16:creationId xmlns:a16="http://schemas.microsoft.com/office/drawing/2014/main" id="{BDA54B1A-B0E7-5197-BA05-AF20B60D8B78}"/>
               </a:ext>
             </a:extLst>
           </p:cNvPr>
@@ -2887,7 +2887,7 @@
           <p:cNvPr id="3" name="content-top-rule">
             <a:extLst xmlns:a="http://schemas.openxmlformats.org/drawingml/2006/main">
               <a:ext uri="{FF2B5EF4-FFF2-40B4-BE49-F238E27FC236}">
-                <a16:creationId xmlns:a16="http://schemas.microsoft.com/office/drawing/2014/main" id="{55AFAC0A-F587-4C8F-828E-724D9DCA8C41}"/>
+                <a16:creationId xmlns:a16="http://schemas.microsoft.com/office/drawing/2014/main" id="{689CAA47-CF3E-5B0E-B6FD-D49EDC325E86}"/>
               </a:ext>
             </a:extLst>
           </p:cNvPr>
@@ -2918,7 +2918,7 @@
           <p:cNvPr id="4" name="content-row-01-number">
             <a:extLst xmlns:a="http://schemas.openxmlformats.org/drawingml/2006/main">
               <a:ext uri="{FF2B5EF4-FFF2-40B4-BE49-F238E27FC236}">
-                <a16:creationId xmlns:a16="http://schemas.microsoft.com/office/drawing/2014/main" id="{C5F2954B-030B-4E16-9E10-9213E644F1A5}"/>
+                <a16:creationId xmlns:a16="http://schemas.microsoft.com/office/drawing/2014/main" id="{50F66AD4-41A8-55FA-8292-7DA342807CA5}"/>
               </a:ext>
             </a:extLst>
           </p:cNvPr>
@@ -2970,7 +2970,7 @@
           <p:cNvPr id="5" name="content-row-01-heading">
             <a:extLst xmlns:a="http://schemas.openxmlformats.org/drawingml/2006/main">
               <a:ext uri="{FF2B5EF4-FFF2-40B4-BE49-F238E27FC236}">
-                <a16:creationId xmlns:a16="http://schemas.microsoft.com/office/drawing/2014/main" id="{156589AC-ADFD-493B-A028-EACCC2745BF4}"/>
+                <a16:creationId xmlns:a16="http://schemas.microsoft.com/office/drawing/2014/main" id="{ED5EC6B2-03BA-561B-867F-4BCD52A79C0A}"/>
               </a:ext>
             </a:extLst>
           </p:cNvPr>
@@ -3022,7 +3022,7 @@
           <p:cNvPr id="6" name="content-row-01-body">
             <a:extLst xmlns:a="http://schemas.openxmlformats.org/drawingml/2006/main">
               <a:ext uri="{FF2B5EF4-FFF2-40B4-BE49-F238E27FC236}">
-                <a16:creationId xmlns:a16="http://schemas.microsoft.com/office/drawing/2014/main" id="{83741572-27A2-4EF1-AD6A-823683837110}"/>
+                <a16:creationId xmlns:a16="http://schemas.microsoft.com/office/drawing/2014/main" id="{70003C15-970A-57A7-BFFD-B4B3E1B7554C}"/>
               </a:ext>
             </a:extLst>
           </p:cNvPr>
@@ -3074,7 +3074,7 @@
           <p:cNvPr id="7" name="content-row-01-rule">
             <a:extLst xmlns:a="http://schemas.openxmlformats.org/drawingml/2006/main">
               <a:ext uri="{FF2B5EF4-FFF2-40B4-BE49-F238E27FC236}">
-                <a16:creationId xmlns:a16="http://schemas.microsoft.com/office/drawing/2014/main" id="{627F3D83-4579-40B5-BB8D-7B1A26EF2796}"/>
+                <a16:creationId xmlns:a16="http://schemas.microsoft.com/office/drawing/2014/main" id="{9B23E3EF-8142-5EA5-A9C7-1712BB23A0E6}"/>
               </a:ext>
             </a:extLst>
           </p:cNvPr>
@@ -3105,7 +3105,7 @@
           <p:cNvPr id="8" name="content-row-02-number">
             <a:extLst xmlns:a="http://schemas.openxmlformats.org/drawingml/2006/main">
               <a:ext uri="{FF2B5EF4-FFF2-40B4-BE49-F238E27FC236}">
-                <a16:creationId xmlns:a16="http://schemas.microsoft.com/office/drawing/2014/main" id="{CA35740B-D890-4255-BA3B-713D45977164}"/>
+                <a16:creationId xmlns:a16="http://schemas.microsoft.com/office/drawing/2014/main" id="{351FAB7C-C5DE-5B70-A98B-F41BE8369EFC}"/>
               </a:ext>
             </a:extLst>
           </p:cNvPr>
@@ -3157,7 +3157,7 @@
           <p:cNvPr id="9" name="content-row-02-heading">
             <a:extLst xmlns:a="http://schemas.openxmlformats.org/drawingml/2006/main">
               <a:ext uri="{FF2B5EF4-FFF2-40B4-BE49-F238E27FC236}">
-                <a16:creationId xmlns:a16="http://schemas.microsoft.com/office/drawing/2014/main" id="{88499F3F-59E0-4B5F-8543-67FE336FF200}"/>
+                <a16:creationId xmlns:a16="http://schemas.microsoft.com/office/drawing/2014/main" id="{02D9D106-C56A-587D-A36A-586AE9C12115}"/>
               </a:ext>
             </a:extLst>
           </p:cNvPr>
@@ -3209,7 +3209,7 @@
           <p:cNvPr id="10" name="content-row-02-body">
             <a:extLst xmlns:a="http://schemas.openxmlformats.org/drawingml/2006/main">
               <a:ext uri="{FF2B5EF4-FFF2-40B4-BE49-F238E27FC236}">
-                <a16:creationId xmlns:a16="http://schemas.microsoft.com/office/drawing/2014/main" id="{D641EF92-368A-4FD4-B7CA-46F0DC76FB7A}"/>
+                <a16:creationId xmlns:a16="http://schemas.microsoft.com/office/drawing/2014/main" id="{A39D6866-48EF-5287-BD2E-25F3F2DCEC2F}"/>
               </a:ext>
             </a:extLst>
           </p:cNvPr>
@@ -3261,7 +3261,7 @@
           <p:cNvPr id="11" name="content-row-02-rule">
             <a:extLst xmlns:a="http://schemas.openxmlformats.org/drawingml/2006/main">
               <a:ext uri="{FF2B5EF4-FFF2-40B4-BE49-F238E27FC236}">
-                <a16:creationId xmlns:a16="http://schemas.microsoft.com/office/drawing/2014/main" id="{0794C04D-EC64-4326-B7BC-CC7B8E83760A}"/>
+                <a16:creationId xmlns:a16="http://schemas.microsoft.com/office/drawing/2014/main" id="{6C302D8E-7C90-51A3-8310-FB8C7A09D774}"/>
               </a:ext>
             </a:extLst>
           </p:cNvPr>
@@ -3292,7 +3292,7 @@
           <p:cNvPr id="12" name="content-row-03-number">
             <a:extLst xmlns:a="http://schemas.openxmlformats.org/drawingml/2006/main">
               <a:ext uri="{FF2B5EF4-FFF2-40B4-BE49-F238E27FC236}">
-                <a16:creationId xmlns:a16="http://schemas.microsoft.com/office/drawing/2014/main" id="{BAFAB70C-416B-47CF-8E53-6683C3D4D0F1}"/>
+                <a16:creationId xmlns:a16="http://schemas.microsoft.com/office/drawing/2014/main" id="{641345D4-1399-5DC3-81E8-10B89799D099}"/>
               </a:ext>
             </a:extLst>
           </p:cNvPr>
@@ -3344,7 +3344,7 @@
           <p:cNvPr id="13" name="content-row-03-heading">
             <a:extLst xmlns:a="http://schemas.openxmlformats.org/drawingml/2006/main">
               <a:ext uri="{FF2B5EF4-FFF2-40B4-BE49-F238E27FC236}">
-                <a16:creationId xmlns:a16="http://schemas.microsoft.com/office/drawing/2014/main" id="{3AE70FC5-4189-41E8-959D-990199E1E958}"/>
+                <a16:creationId xmlns:a16="http://schemas.microsoft.com/office/drawing/2014/main" id="{A0F6DAE0-AD1C-5849-9028-42973277C4F9}"/>
               </a:ext>
             </a:extLst>
           </p:cNvPr>
@@ -3396,7 +3396,7 @@
           <p:cNvPr id="14" name="content-row-03-body">
             <a:extLst xmlns:a="http://schemas.openxmlformats.org/drawingml/2006/main">
               <a:ext uri="{FF2B5EF4-FFF2-40B4-BE49-F238E27FC236}">
-                <a16:creationId xmlns:a16="http://schemas.microsoft.com/office/drawing/2014/main" id="{C679D83F-F158-47F4-BF36-98D5A633222A}"/>
+                <a16:creationId xmlns:a16="http://schemas.microsoft.com/office/drawing/2014/main" id="{54048FFA-6381-539D-9B18-8A502ED664AB}"/>
               </a:ext>
             </a:extLst>
           </p:cNvPr>
@@ -3448,7 +3448,7 @@
           <p:cNvPr id="15" name="content-row-03-rule">
             <a:extLst xmlns:a="http://schemas.openxmlformats.org/drawingml/2006/main">
               <a:ext uri="{FF2B5EF4-FFF2-40B4-BE49-F238E27FC236}">
-                <a16:creationId xmlns:a16="http://schemas.microsoft.com/office/drawing/2014/main" id="{13F30FDF-F5C0-4794-840C-385ED7F68F12}"/>
+                <a16:creationId xmlns:a16="http://schemas.microsoft.com/office/drawing/2014/main" id="{A853A0F3-F792-5A73-AA51-DD083073C84A}"/>
               </a:ext>
             </a:extLst>
           </p:cNvPr>
@@ -3479,7 +3479,7 @@
           <p:cNvPr id="16" name="footer-wordmark-{{FOLIO}}">
             <a:extLst xmlns:a="http://schemas.openxmlformats.org/drawingml/2006/main">
               <a:ext uri="{FF2B5EF4-FFF2-40B4-BE49-F238E27FC236}">
-                <a16:creationId xmlns:a16="http://schemas.microsoft.com/office/drawing/2014/main" id="{0D90F6D6-EBFE-44F8-A9D2-F6F01B5BA8E8}"/>
+                <a16:creationId xmlns:a16="http://schemas.microsoft.com/office/drawing/2014/main" id="{1799B566-9399-54B5-84BD-D7F6BAD97093}"/>
               </a:ext>
             </a:extLst>
           </p:cNvPr>
@@ -3531,7 +3531,7 @@
           <p:cNvPr id="17" name="footer-folio-{{FOLIO}}">
             <a:extLst xmlns:a="http://schemas.openxmlformats.org/drawingml/2006/main">
               <a:ext uri="{FF2B5EF4-FFF2-40B4-BE49-F238E27FC236}">
-                <a16:creationId xmlns:a16="http://schemas.microsoft.com/office/drawing/2014/main" id="{06148F06-47AB-47AC-9539-7CEBF19C652D}"/>
+                <a16:creationId xmlns:a16="http://schemas.microsoft.com/office/drawing/2014/main" id="{B12836D9-877E-5A4E-A9C0-1B0D8220CFC5}"/>
               </a:ext>
             </a:extLst>
           </p:cNvPr>
@@ -3581,7 +3581,7 @@
     </p:spTree>
     <p:extLst>
       <p:ext uri="{BB962C8B-B14F-4D97-AF65-F5344CB8AC3E}">
-        <p14:creationId xmlns:p14="http://schemas.microsoft.com/office/powerpoint/2010/main" val="2000775771"/>
+        <p14:creationId xmlns:p14="http://schemas.microsoft.com/office/powerpoint/2010/main" val="1583880013"/>
       </p:ext>
     </p:extLst>
   </p:cSld>
@@ -3612,7 +3612,7 @@
           <p:cNvPr id="17" name="evidence-eyebrow">
             <a:extLst xmlns:a="http://schemas.openxmlformats.org/drawingml/2006/main">
               <a:ext uri="{FF2B5EF4-FFF2-40B4-BE49-F238E27FC236}">
-                <a16:creationId xmlns:a16="http://schemas.microsoft.com/office/drawing/2014/main" id="{7BDFAE34-0E68-40F2-B702-5ABAB4CF73A5}"/>
+                <a16:creationId xmlns:a16="http://schemas.microsoft.com/office/drawing/2014/main" id="{E35C445F-6442-5B0B-9591-45D894EE8B25}"/>
               </a:ext>
             </a:extLst>
           </p:cNvPr>
@@ -3664,7 +3664,7 @@
           <p:cNvPr id="2" name="evidence-heading">
             <a:extLst xmlns:a="http://schemas.openxmlformats.org/drawingml/2006/main">
               <a:ext uri="{FF2B5EF4-FFF2-40B4-BE49-F238E27FC236}">
-                <a16:creationId xmlns:a16="http://schemas.microsoft.com/office/drawing/2014/main" id="{5A69978A-EC09-42E9-BEBD-E848E75FC33D}"/>
+                <a16:creationId xmlns:a16="http://schemas.microsoft.com/office/drawing/2014/main" id="{0FE16208-7B54-5CD1-AB6A-276670DFE6D1}"/>
               </a:ext>
             </a:extLst>
           </p:cNvPr>
@@ -3716,7 +3716,7 @@
           <p:cNvPr id="3" name="evidence-ONE-rule">
             <a:extLst xmlns:a="http://schemas.openxmlformats.org/drawingml/2006/main">
               <a:ext uri="{FF2B5EF4-FFF2-40B4-BE49-F238E27FC236}">
-                <a16:creationId xmlns:a16="http://schemas.microsoft.com/office/drawing/2014/main" id="{1F96B506-A281-41D3-9FB2-D0351D53B901}"/>
+                <a16:creationId xmlns:a16="http://schemas.microsoft.com/office/drawing/2014/main" id="{DA46C44D-9189-5B0C-8900-CF0B3BE78902}"/>
               </a:ext>
             </a:extLst>
           </p:cNvPr>
@@ -3747,7 +3747,7 @@
           <p:cNvPr id="4" name="evidence-ONE-value">
             <a:extLst xmlns:a="http://schemas.openxmlformats.org/drawingml/2006/main">
               <a:ext uri="{FF2B5EF4-FFF2-40B4-BE49-F238E27FC236}">
-                <a16:creationId xmlns:a16="http://schemas.microsoft.com/office/drawing/2014/main" id="{4B55BEA1-CCFF-4315-BA2D-00AA9066C1D9}"/>
+                <a16:creationId xmlns:a16="http://schemas.microsoft.com/office/drawing/2014/main" id="{AA19070C-37D5-5B71-B577-E011168C6629}"/>
               </a:ext>
             </a:extLst>
           </p:cNvPr>
@@ -3799,7 +3799,7 @@
           <p:cNvPr id="5" name="evidence-ONE-claim">
             <a:extLst xmlns:a="http://schemas.openxmlformats.org/drawingml/2006/main">
               <a:ext uri="{FF2B5EF4-FFF2-40B4-BE49-F238E27FC236}">
-                <a16:creationId xmlns:a16="http://schemas.microsoft.com/office/drawing/2014/main" id="{CE6BC6FF-5982-47CE-94D4-55C1841EC5FC}"/>
+                <a16:creationId xmlns:a16="http://schemas.microsoft.com/office/drawing/2014/main" id="{58AB29AC-96A7-584A-976C-C15BC8C4F229}"/>
               </a:ext>
             </a:extLst>
           </p:cNvPr>
@@ -3851,7 +3851,7 @@
           <p:cNvPr id="6" name="evidence-ONE-source">
             <a:extLst xmlns:a="http://schemas.openxmlformats.org/drawingml/2006/main">
               <a:ext uri="{FF2B5EF4-FFF2-40B4-BE49-F238E27FC236}">
-                <a16:creationId xmlns:a16="http://schemas.microsoft.com/office/drawing/2014/main" id="{7DABFA8E-D15F-444B-9E60-7838086A69A5}"/>
+                <a16:creationId xmlns:a16="http://schemas.microsoft.com/office/drawing/2014/main" id="{4C181F75-9E91-5A66-8B93-ABC10690D5F7}"/>
               </a:ext>
             </a:extLst>
           </p:cNvPr>
@@ -3903,7 +3903,7 @@
           <p:cNvPr id="7" name="evidence-TWO-rule">
             <a:extLst xmlns:a="http://schemas.openxmlformats.org/drawingml/2006/main">
               <a:ext uri="{FF2B5EF4-FFF2-40B4-BE49-F238E27FC236}">
-                <a16:creationId xmlns:a16="http://schemas.microsoft.com/office/drawing/2014/main" id="{5F88BF7D-0450-4DCD-907D-FB6ADDDC2598}"/>
+                <a16:creationId xmlns:a16="http://schemas.microsoft.com/office/drawing/2014/main" id="{52AF0577-26C1-5F13-9B93-164CDC166F1D}"/>
               </a:ext>
             </a:extLst>
           </p:cNvPr>
@@ -3934,7 +3934,7 @@
           <p:cNvPr id="8" name="evidence-TWO-value">
             <a:extLst xmlns:a="http://schemas.openxmlformats.org/drawingml/2006/main">
               <a:ext uri="{FF2B5EF4-FFF2-40B4-BE49-F238E27FC236}">
-                <a16:creationId xmlns:a16="http://schemas.microsoft.com/office/drawing/2014/main" id="{495F2654-3460-4EC8-B868-F1D7AE8B3A57}"/>
+                <a16:creationId xmlns:a16="http://schemas.microsoft.com/office/drawing/2014/main" id="{FEF79354-7449-5DA9-B45B-AFA8B066A943}"/>
               </a:ext>
             </a:extLst>
           </p:cNvPr>
@@ -3986,7 +3986,7 @@
           <p:cNvPr id="9" name="evidence-TWO-claim">
             <a:extLst xmlns:a="http://schemas.openxmlformats.org/drawingml/2006/main">
               <a:ext uri="{FF2B5EF4-FFF2-40B4-BE49-F238E27FC236}">
-                <a16:creationId xmlns:a16="http://schemas.microsoft.com/office/drawing/2014/main" id="{1577AB4D-C3B6-47BE-8A75-4DF8F2B4AFD5}"/>
+                <a16:creationId xmlns:a16="http://schemas.microsoft.com/office/drawing/2014/main" id="{9CBEB932-1493-54AD-857D-D1D64FDE22B5}"/>
               </a:ext>
             </a:extLst>
           </p:cNvPr>
@@ -4038,7 +4038,7 @@
           <p:cNvPr id="10" name="evidence-TWO-source">
             <a:extLst xmlns:a="http://schemas.openxmlformats.org/drawingml/2006/main">
               <a:ext uri="{FF2B5EF4-FFF2-40B4-BE49-F238E27FC236}">
-                <a16:creationId xmlns:a16="http://schemas.microsoft.com/office/drawing/2014/main" id="{38C51858-675B-4721-BD64-09B8213A5F6B}"/>
+                <a16:creationId xmlns:a16="http://schemas.microsoft.com/office/drawing/2014/main" id="{E8B636AF-75EE-5709-AE08-6FDF1143A108}"/>
               </a:ext>
             </a:extLst>
           </p:cNvPr>
@@ -4090,7 +4090,7 @@
           <p:cNvPr id="11" name="evidence-THREE-rule">
             <a:extLst xmlns:a="http://schemas.openxmlformats.org/drawingml/2006/main">
               <a:ext uri="{FF2B5EF4-FFF2-40B4-BE49-F238E27FC236}">
-                <a16:creationId xmlns:a16="http://schemas.microsoft.com/office/drawing/2014/main" id="{12128C4C-0EB6-4111-83F4-E43F0BA6468D}"/>
+                <a16:creationId xmlns:a16="http://schemas.microsoft.com/office/drawing/2014/main" id="{6AE56476-D154-5DF7-9E76-8FDBFFD3B855}"/>
               </a:ext>
             </a:extLst>
           </p:cNvPr>
@@ -4121,7 +4121,7 @@
           <p:cNvPr id="12" name="evidence-THREE-value">
             <a:extLst xmlns:a="http://schemas.openxmlformats.org/drawingml/2006/main">
               <a:ext uri="{FF2B5EF4-FFF2-40B4-BE49-F238E27FC236}">
-                <a16:creationId xmlns:a16="http://schemas.microsoft.com/office/drawing/2014/main" id="{9D0AFAF0-2561-48DF-A569-31F379EFFF5D}"/>
+                <a16:creationId xmlns:a16="http://schemas.microsoft.com/office/drawing/2014/main" id="{4D7DE544-D56D-5FFD-A3BA-97666A35FB4A}"/>
               </a:ext>
             </a:extLst>
           </p:cNvPr>
@@ -4173,7 +4173,7 @@
           <p:cNvPr id="13" name="evidence-THREE-claim">
             <a:extLst xmlns:a="http://schemas.openxmlformats.org/drawingml/2006/main">
               <a:ext uri="{FF2B5EF4-FFF2-40B4-BE49-F238E27FC236}">
-                <a16:creationId xmlns:a16="http://schemas.microsoft.com/office/drawing/2014/main" id="{3DD93D0C-565D-47D7-9532-557D86247E4E}"/>
+                <a16:creationId xmlns:a16="http://schemas.microsoft.com/office/drawing/2014/main" id="{91561FFF-A078-5026-8CC3-783BDC1B5829}"/>
               </a:ext>
             </a:extLst>
           </p:cNvPr>
@@ -4225,7 +4225,7 @@
           <p:cNvPr id="14" name="evidence-THREE-source">
             <a:extLst xmlns:a="http://schemas.openxmlformats.org/drawingml/2006/main">
               <a:ext uri="{FF2B5EF4-FFF2-40B4-BE49-F238E27FC236}">
-                <a16:creationId xmlns:a16="http://schemas.microsoft.com/office/drawing/2014/main" id="{84B31344-B6A5-431B-B255-CF3E6E1DB370}"/>
+                <a16:creationId xmlns:a16="http://schemas.microsoft.com/office/drawing/2014/main" id="{CDB2B932-21CB-50A5-ACF8-99BB96A786D9}"/>
               </a:ext>
             </a:extLst>
           </p:cNvPr>
@@ -4277,7 +4277,7 @@
           <p:cNvPr id="15" name="footer-wordmark-{{FOLIO}}">
             <a:extLst xmlns:a="http://schemas.openxmlformats.org/drawingml/2006/main">
               <a:ext uri="{FF2B5EF4-FFF2-40B4-BE49-F238E27FC236}">
-                <a16:creationId xmlns:a16="http://schemas.microsoft.com/office/drawing/2014/main" id="{7884120F-D192-4A1F-B92B-D50F6A0F388A}"/>
+                <a16:creationId xmlns:a16="http://schemas.microsoft.com/office/drawing/2014/main" id="{38A128B0-3040-5C28-8628-ACAF1B08836F}"/>
               </a:ext>
             </a:extLst>
           </p:cNvPr>
@@ -4329,7 +4329,7 @@
           <p:cNvPr id="16" name="footer-folio-{{FOLIO}}">
             <a:extLst xmlns:a="http://schemas.openxmlformats.org/drawingml/2006/main">
               <a:ext uri="{FF2B5EF4-FFF2-40B4-BE49-F238E27FC236}">
-                <a16:creationId xmlns:a16="http://schemas.microsoft.com/office/drawing/2014/main" id="{E3539AEA-500F-4276-BD37-E2F746F75A29}"/>
+                <a16:creationId xmlns:a16="http://schemas.microsoft.com/office/drawing/2014/main" id="{A1FE5AF1-F69A-5EEA-A86F-0BD55DC52B5F}"/>
               </a:ext>
             </a:extLst>
           </p:cNvPr>
@@ -4379,7 +4379,7 @@
     </p:spTree>
     <p:extLst>
       <p:ext uri="{BB962C8B-B14F-4D97-AF65-F5344CB8AC3E}">
-        <p14:creationId xmlns:p14="http://schemas.microsoft.com/office/powerpoint/2010/main" val="219139856"/>
+        <p14:creationId xmlns:p14="http://schemas.microsoft.com/office/powerpoint/2010/main" val="1468067762"/>
       </p:ext>
     </p:extLst>
   </p:cSld>
@@ -4410,7 +4410,7 @@
           <p:cNvPr id="5" name="quote-mark">
             <a:extLst xmlns:a="http://schemas.openxmlformats.org/drawingml/2006/main">
               <a:ext uri="{FF2B5EF4-FFF2-40B4-BE49-F238E27FC236}">
-                <a16:creationId xmlns:a16="http://schemas.microsoft.com/office/drawing/2014/main" id="{6B509644-330B-4CE9-86BB-696707F53426}"/>
+                <a16:creationId xmlns:a16="http://schemas.microsoft.com/office/drawing/2014/main" id="{C76803E3-23A3-5A7E-8531-43AD9595663A}"/>
               </a:ext>
             </a:extLst>
           </p:cNvPr>
@@ -4462,7 +4462,7 @@
           <p:cNvPr id="2" name="quote-text">
             <a:extLst xmlns:a="http://schemas.openxmlformats.org/drawingml/2006/main">
               <a:ext uri="{FF2B5EF4-FFF2-40B4-BE49-F238E27FC236}">
-                <a16:creationId xmlns:a16="http://schemas.microsoft.com/office/drawing/2014/main" id="{6C81B1F8-7884-4B6F-91A7-2A16C2BB250E}"/>
+                <a16:creationId xmlns:a16="http://schemas.microsoft.com/office/drawing/2014/main" id="{999A823E-FC6C-504E-A213-B4AD38CF3E8C}"/>
               </a:ext>
             </a:extLst>
           </p:cNvPr>
@@ -4514,7 +4514,7 @@
           <p:cNvPr id="3" name="quote-attribution">
             <a:extLst xmlns:a="http://schemas.openxmlformats.org/drawingml/2006/main">
               <a:ext uri="{FF2B5EF4-FFF2-40B4-BE49-F238E27FC236}">
-                <a16:creationId xmlns:a16="http://schemas.microsoft.com/office/drawing/2014/main" id="{82982954-758B-4264-80B6-32F9CC37B049}"/>
+                <a16:creationId xmlns:a16="http://schemas.microsoft.com/office/drawing/2014/main" id="{F651A96E-597E-5724-BBF9-F32B85F34463}"/>
               </a:ext>
             </a:extLst>
           </p:cNvPr>
@@ -4566,7 +4566,7 @@
           <p:cNvPr id="4" name="quote-source">
             <a:extLst xmlns:a="http://schemas.openxmlformats.org/drawingml/2006/main">
               <a:ext uri="{FF2B5EF4-FFF2-40B4-BE49-F238E27FC236}">
-                <a16:creationId xmlns:a16="http://schemas.microsoft.com/office/drawing/2014/main" id="{8CEFEAA3-9319-4AAB-AC29-02ACB2E00CC9}"/>
+                <a16:creationId xmlns:a16="http://schemas.microsoft.com/office/drawing/2014/main" id="{6F6CC0E8-4ED3-531D-B87A-3B206667C3A4}"/>
               </a:ext>
             </a:extLst>
           </p:cNvPr>
@@ -4616,7 +4616,7 @@
     </p:spTree>
     <p:extLst>
       <p:ext uri="{BB962C8B-B14F-4D97-AF65-F5344CB8AC3E}">
-        <p14:creationId xmlns:p14="http://schemas.microsoft.com/office/powerpoint/2010/main" val="1441691486"/>
+        <p14:creationId xmlns:p14="http://schemas.microsoft.com/office/powerpoint/2010/main" val="628303973"/>
       </p:ext>
     </p:extLst>
   </p:cSld>
@@ -4651,7 +4651,7 @@
           <p:nvPr/>
         </p:nvPicPr>
         <p:blipFill>
-          <a:blip xmlns:r="http://schemas.openxmlformats.org/officeDocument/2006/relationships" xmlns:a="http://schemas.openxmlformats.org/drawingml/2006/main" r:embed="R5aff549c9fb040be"/>
+          <a:blip xmlns:r="http://schemas.openxmlformats.org/officeDocument/2006/relationships" xmlns:a="http://schemas.openxmlformats.org/drawingml/2006/main" r:embed="rId1"/>
           <a:stretch xmlns:a="http://schemas.openxmlformats.org/drawingml/2006/main"/>
         </p:blipFill>
         <p:spPr>
@@ -4669,7 +4669,7 @@
           <p:cNvPr id="2" name="closing-heading">
             <a:extLst xmlns:a="http://schemas.openxmlformats.org/drawingml/2006/main">
               <a:ext uri="{FF2B5EF4-FFF2-40B4-BE49-F238E27FC236}">
-                <a16:creationId xmlns:a16="http://schemas.microsoft.com/office/drawing/2014/main" id="{00219257-4FBB-4247-9992-AF651A756426}"/>
+                <a16:creationId xmlns:a16="http://schemas.microsoft.com/office/drawing/2014/main" id="{2E36E15A-7002-5558-B6C3-80324026504F}"/>
               </a:ext>
             </a:extLst>
           </p:cNvPr>
@@ -4721,7 +4721,7 @@
           <p:cNvPr id="3" name="closing-action">
             <a:extLst xmlns:a="http://schemas.openxmlformats.org/drawingml/2006/main">
               <a:ext uri="{FF2B5EF4-FFF2-40B4-BE49-F238E27FC236}">
-                <a16:creationId xmlns:a16="http://schemas.microsoft.com/office/drawing/2014/main" id="{FE8C56E9-936F-4380-944F-DA187AC81BE8}"/>
+                <a16:creationId xmlns:a16="http://schemas.microsoft.com/office/drawing/2014/main" id="{2FC8B57D-D05A-5724-AB90-4789829F2C09}"/>
               </a:ext>
             </a:extLst>
           </p:cNvPr>
@@ -4752,7 +4752,7 @@
           <p:cNvPr id="4" name="closing-action-label">
             <a:extLst xmlns:a="http://schemas.openxmlformats.org/drawingml/2006/main">
               <a:ext uri="{FF2B5EF4-FFF2-40B4-BE49-F238E27FC236}">
-                <a16:creationId xmlns:a16="http://schemas.microsoft.com/office/drawing/2014/main" id="{41CA16BD-C3FF-4727-9E6F-ECA6082E5462}"/>
+                <a16:creationId xmlns:a16="http://schemas.microsoft.com/office/drawing/2014/main" id="{AC7C8004-4394-54A5-A0A7-03145DAEDACB}"/>
               </a:ext>
             </a:extLst>
           </p:cNvPr>
@@ -4804,7 +4804,7 @@
           <p:cNvPr id="5" name="closing-action-signal">
             <a:extLst xmlns:a="http://schemas.openxmlformats.org/drawingml/2006/main">
               <a:ext uri="{FF2B5EF4-FFF2-40B4-BE49-F238E27FC236}">
-                <a16:creationId xmlns:a16="http://schemas.microsoft.com/office/drawing/2014/main" id="{BA6A24FA-C7D0-40B2-8695-F4652FCE988D}"/>
+                <a16:creationId xmlns:a16="http://schemas.microsoft.com/office/drawing/2014/main" id="{4EED0E5E-60A7-5329-9FDF-2A8F989E6798}"/>
               </a:ext>
             </a:extLst>
           </p:cNvPr>
@@ -4835,7 +4835,7 @@
           <p:cNvPr id="6" name="closing-contact">
             <a:extLst xmlns:a="http://schemas.openxmlformats.org/drawingml/2006/main">
               <a:ext uri="{FF2B5EF4-FFF2-40B4-BE49-F238E27FC236}">
-                <a16:creationId xmlns:a16="http://schemas.microsoft.com/office/drawing/2014/main" id="{5C7C5C10-BEED-4251-8FA9-2789C10C6654}"/>
+                <a16:creationId xmlns:a16="http://schemas.microsoft.com/office/drawing/2014/main" id="{3443E47E-6AE9-58D5-9E87-F47073A07749}"/>
               </a:ext>
             </a:extLst>
           </p:cNvPr>
@@ -4887,7 +4887,7 @@
           <p:cNvPr id="7" name="footer-wordmark-{{FOLIO}}">
             <a:extLst xmlns:a="http://schemas.openxmlformats.org/drawingml/2006/main">
               <a:ext uri="{FF2B5EF4-FFF2-40B4-BE49-F238E27FC236}">
-                <a16:creationId xmlns:a16="http://schemas.microsoft.com/office/drawing/2014/main" id="{07C58FCB-D853-43F2-A29F-0A3E6AD82339}"/>
+                <a16:creationId xmlns:a16="http://schemas.microsoft.com/office/drawing/2014/main" id="{4A99FAD8-F221-5346-8B17-15D98EA05B93}"/>
               </a:ext>
             </a:extLst>
           </p:cNvPr>
@@ -4939,7 +4939,7 @@
           <p:cNvPr id="8" name="footer-folio-{{FOLIO}}">
             <a:extLst xmlns:a="http://schemas.openxmlformats.org/drawingml/2006/main">
               <a:ext uri="{FF2B5EF4-FFF2-40B4-BE49-F238E27FC236}">
-                <a16:creationId xmlns:a16="http://schemas.microsoft.com/office/drawing/2014/main" id="{60A12237-FEF7-422D-8D64-27C9FFA0858B}"/>
+                <a16:creationId xmlns:a16="http://schemas.microsoft.com/office/drawing/2014/main" id="{C34121BC-EFE0-5BE5-A957-6845D2541FA9}"/>
               </a:ext>
             </a:extLst>
           </p:cNvPr>
@@ -4989,7 +4989,7 @@
     </p:spTree>
     <p:extLst>
       <p:ext uri="{BB962C8B-B14F-4D97-AF65-F5344CB8AC3E}">
-        <p14:creationId xmlns:p14="http://schemas.microsoft.com/office/powerpoint/2010/main" val="1725745275"/>
+        <p14:creationId xmlns:p14="http://schemas.microsoft.com/office/powerpoint/2010/main" val="2091892746"/>
       </p:ext>
     </p:extLst>
   </p:cSld>
